--- a/UX valgfag2026.pptx
+++ b/UX valgfag2026.pptx
@@ -6,7 +6,7 @@
     <p:sldMasterId id="2147483696" r:id="rId5"/>
   </p:sldMasterIdLst>
   <p:notesMasterIdLst>
-    <p:notesMasterId r:id="rId32"/>
+    <p:notesMasterId r:id="rId33"/>
   </p:notesMasterIdLst>
   <p:sldIdLst>
     <p:sldId id="257" r:id="rId6"/>
@@ -18,23 +18,24 @@
     <p:sldId id="315" r:id="rId12"/>
     <p:sldId id="1325" r:id="rId13"/>
     <p:sldId id="1324" r:id="rId14"/>
-    <p:sldId id="1027" r:id="rId15"/>
-    <p:sldId id="1330" r:id="rId16"/>
-    <p:sldId id="1327" r:id="rId17"/>
-    <p:sldId id="1332" r:id="rId18"/>
-    <p:sldId id="1329" r:id="rId19"/>
-    <p:sldId id="1029" r:id="rId20"/>
-    <p:sldId id="260" r:id="rId21"/>
-    <p:sldId id="261" r:id="rId22"/>
-    <p:sldId id="266" r:id="rId23"/>
-    <p:sldId id="265" r:id="rId24"/>
-    <p:sldId id="262" r:id="rId25"/>
-    <p:sldId id="290" r:id="rId26"/>
-    <p:sldId id="289" r:id="rId27"/>
-    <p:sldId id="270" r:id="rId28"/>
-    <p:sldId id="271" r:id="rId29"/>
-    <p:sldId id="1326" r:id="rId30"/>
-    <p:sldId id="295" r:id="rId31"/>
+    <p:sldId id="1333" r:id="rId15"/>
+    <p:sldId id="1027" r:id="rId16"/>
+    <p:sldId id="1330" r:id="rId17"/>
+    <p:sldId id="1327" r:id="rId18"/>
+    <p:sldId id="1332" r:id="rId19"/>
+    <p:sldId id="1329" r:id="rId20"/>
+    <p:sldId id="1029" r:id="rId21"/>
+    <p:sldId id="260" r:id="rId22"/>
+    <p:sldId id="261" r:id="rId23"/>
+    <p:sldId id="266" r:id="rId24"/>
+    <p:sldId id="265" r:id="rId25"/>
+    <p:sldId id="262" r:id="rId26"/>
+    <p:sldId id="290" r:id="rId27"/>
+    <p:sldId id="289" r:id="rId28"/>
+    <p:sldId id="270" r:id="rId29"/>
+    <p:sldId id="271" r:id="rId30"/>
+    <p:sldId id="1326" r:id="rId31"/>
+    <p:sldId id="295" r:id="rId32"/>
   </p:sldIdLst>
   <p:sldSz cx="9144000" cy="5715000" type="screen16x10"/>
   <p:notesSz cx="6858000" cy="9144000"/>
@@ -791,7 +792,7 @@
                 <a:tabLst/>
                 <a:defRPr/>
               </a:pPr>
-              <a:t>14</a:t>
+              <a:t>15</a:t>
             </a:fld>
             <a:endParaRPr kumimoji="0" lang="da-DK" sz="1200" b="0" i="0" u="none" strike="noStrike" kern="1200" cap="none" spc="0" normalizeH="0" baseline="0" noProof="0">
               <a:ln>
@@ -1447,7 +1448,7 @@
           <a:p>
             <a:fld id="{D6AE7CD0-851D-0C45-A7E7-41EE6AA4D840}" type="slidenum">
               <a:rPr lang="da-DK" smtClean="0"/>
-              <a:t>10</a:t>
+              <a:t>11</a:t>
             </a:fld>
             <a:endParaRPr lang="da-DK"/>
           </a:p>
@@ -1634,7 +1635,7 @@
                 <a:tabLst/>
                 <a:defRPr/>
               </a:pPr>
-              <a:t>12</a:t>
+              <a:t>13</a:t>
             </a:fld>
             <a:endParaRPr kumimoji="0" lang="da-DK" sz="1200" b="0" i="0" u="none" strike="noStrike" kern="1200" cap="none" spc="0" normalizeH="0" baseline="0" noProof="0">
               <a:ln>
@@ -7309,6 +7310,134 @@
   <p:cSld>
     <p:spTree>
       <p:nvGrpSpPr>
+        <p:cNvPr id="1" name=""/>
+        <p:cNvGrpSpPr/>
+        <p:nvPr/>
+      </p:nvGrpSpPr>
+      <p:grpSpPr>
+        <a:xfrm>
+          <a:off x="0" y="0"/>
+          <a:ext cx="0" cy="0"/>
+          <a:chOff x="0" y="0"/>
+          <a:chExt cx="0" cy="0"/>
+        </a:xfrm>
+      </p:grpSpPr>
+      <p:sp>
+        <p:nvSpPr>
+          <p:cNvPr id="2" name="Title 1">
+            <a:extLst>
+              <a:ext uri="{FF2B5EF4-FFF2-40B4-BE49-F238E27FC236}">
+                <a16:creationId xmlns:a16="http://schemas.microsoft.com/office/drawing/2014/main" id="{74D815A4-C721-540E-FDE2-A5C8B157CA8E}"/>
+              </a:ext>
+            </a:extLst>
+          </p:cNvPr>
+          <p:cNvSpPr>
+            <a:spLocks noGrp="1"/>
+          </p:cNvSpPr>
+          <p:nvPr>
+            <p:ph type="title"/>
+          </p:nvPr>
+        </p:nvSpPr>
+        <p:spPr/>
+        <p:txBody>
+          <a:bodyPr/>
+          <a:lstStyle/>
+          <a:p>
+            <a:r>
+              <a:rPr lang="en-DK" dirty="0"/>
+              <a:t>UX team i B&amp;O Struer</a:t>
+            </a:r>
+          </a:p>
+        </p:txBody>
+      </p:sp>
+      <p:sp>
+        <p:nvSpPr>
+          <p:cNvPr id="3" name="Content Placeholder 2">
+            <a:extLst>
+              <a:ext uri="{FF2B5EF4-FFF2-40B4-BE49-F238E27FC236}">
+                <a16:creationId xmlns:a16="http://schemas.microsoft.com/office/drawing/2014/main" id="{0E2A196D-AEB5-2E69-4B05-F6B612E0A79E}"/>
+              </a:ext>
+            </a:extLst>
+          </p:cNvPr>
+          <p:cNvSpPr>
+            <a:spLocks noGrp="1"/>
+          </p:cNvSpPr>
+          <p:nvPr>
+            <p:ph idx="1"/>
+          </p:nvPr>
+        </p:nvSpPr>
+        <p:spPr/>
+        <p:txBody>
+          <a:bodyPr/>
+          <a:lstStyle/>
+          <a:p>
+            <a:r>
+              <a:rPr lang="en-GB" dirty="0"/>
+              <a:t>G</a:t>
+            </a:r>
+            <a:r>
+              <a:rPr lang="en-DK" dirty="0"/>
+              <a:t>raphic designer</a:t>
+            </a:r>
+          </a:p>
+          <a:p>
+            <a:r>
+              <a:rPr lang="en-DK" dirty="0"/>
+              <a:t>UX researcher</a:t>
+            </a:r>
+          </a:p>
+          <a:p>
+            <a:r>
+              <a:rPr lang="en-DK" dirty="0"/>
+              <a:t>UI designer</a:t>
+            </a:r>
+          </a:p>
+          <a:p>
+            <a:r>
+              <a:rPr lang="en-GB" dirty="0"/>
+              <a:t>I</a:t>
+            </a:r>
+            <a:r>
+              <a:rPr lang="en-DK" dirty="0"/>
+              <a:t>nteraction designer</a:t>
+            </a:r>
+          </a:p>
+          <a:p>
+            <a:r>
+              <a:rPr lang="en-GB" dirty="0"/>
+              <a:t>P</a:t>
+            </a:r>
+            <a:r>
+              <a:rPr lang="en-DK" dirty="0"/>
+              <a:t>rogrammer/prototyper</a:t>
+            </a:r>
+          </a:p>
+          <a:p>
+            <a:r>
+              <a:rPr lang="en-DK" dirty="0"/>
+              <a:t>Project lead</a:t>
+            </a:r>
+          </a:p>
+        </p:txBody>
+      </p:sp>
+    </p:spTree>
+    <p:extLst>
+      <p:ext uri="{BB962C8B-B14F-4D97-AF65-F5344CB8AC3E}">
+        <p14:creationId xmlns:p14="http://schemas.microsoft.com/office/powerpoint/2010/main" val="75426115"/>
+      </p:ext>
+    </p:extLst>
+  </p:cSld>
+  <p:clrMapOvr>
+    <a:masterClrMapping/>
+  </p:clrMapOvr>
+</p:sld>
+</file>
+
+<file path=ppt/slides/slide11.xml><?xml version="1.0" encoding="utf-8"?>
+<p:sld xmlns:a="http://schemas.openxmlformats.org/drawingml/2006/main" xmlns:r="http://schemas.openxmlformats.org/officeDocument/2006/relationships" xmlns:p="http://schemas.openxmlformats.org/presentationml/2006/main">
+  <p:cSld>
+    <p:spTree>
+      <p:nvGrpSpPr>
         <p:cNvPr id="1" name="">
           <a:extLst>
             <a:ext uri="{FF2B5EF4-FFF2-40B4-BE49-F238E27FC236}">
@@ -7504,7 +7633,7 @@
 </p:sld>
 </file>
 
-<file path=ppt/slides/slide11.xml><?xml version="1.0" encoding="utf-8"?>
+<file path=ppt/slides/slide12.xml><?xml version="1.0" encoding="utf-8"?>
 <p:sld xmlns:a="http://schemas.openxmlformats.org/drawingml/2006/main" xmlns:r="http://schemas.openxmlformats.org/officeDocument/2006/relationships" xmlns:p="http://schemas.openxmlformats.org/presentationml/2006/main">
   <p:cSld>
     <p:spTree>
@@ -7603,7 +7732,7 @@
 </p:sld>
 </file>
 
-<file path=ppt/slides/slide12.xml><?xml version="1.0" encoding="utf-8"?>
+<file path=ppt/slides/slide13.xml><?xml version="1.0" encoding="utf-8"?>
 <p:sld xmlns:a="http://schemas.openxmlformats.org/drawingml/2006/main" xmlns:r="http://schemas.openxmlformats.org/officeDocument/2006/relationships" xmlns:p="http://schemas.openxmlformats.org/presentationml/2006/main">
   <p:cSld>
     <p:bg>
@@ -7742,7 +7871,7 @@
 </p:sld>
 </file>
 
-<file path=ppt/slides/slide13.xml><?xml version="1.0" encoding="utf-8"?>
+<file path=ppt/slides/slide14.xml><?xml version="1.0" encoding="utf-8"?>
 <p:sld xmlns:a="http://schemas.openxmlformats.org/drawingml/2006/main" xmlns:r="http://schemas.openxmlformats.org/officeDocument/2006/relationships" xmlns:p="http://schemas.openxmlformats.org/presentationml/2006/main">
   <p:cSld>
     <p:spTree>
@@ -7839,7 +7968,7 @@
 </p:sld>
 </file>
 
-<file path=ppt/slides/slide14.xml><?xml version="1.0" encoding="utf-8"?>
+<file path=ppt/slides/slide15.xml><?xml version="1.0" encoding="utf-8"?>
 <p:sld xmlns:a="http://schemas.openxmlformats.org/drawingml/2006/main" xmlns:r="http://schemas.openxmlformats.org/officeDocument/2006/relationships" xmlns:p="http://schemas.openxmlformats.org/presentationml/2006/main">
   <p:cSld>
     <p:bg>
@@ -7978,7 +8107,7 @@
 </p:sld>
 </file>
 
-<file path=ppt/slides/slide15.xml><?xml version="1.0" encoding="utf-8"?>
+<file path=ppt/slides/slide16.xml><?xml version="1.0" encoding="utf-8"?>
 <p:sld xmlns:a="http://schemas.openxmlformats.org/drawingml/2006/main" xmlns:r="http://schemas.openxmlformats.org/officeDocument/2006/relationships" xmlns:p="http://schemas.openxmlformats.org/presentationml/2006/main">
   <p:cSld>
     <p:spTree>
@@ -8121,7 +8250,7 @@
 </p:sld>
 </file>
 
-<file path=ppt/slides/slide16.xml><?xml version="1.0" encoding="utf-8"?>
+<file path=ppt/slides/slide17.xml><?xml version="1.0" encoding="utf-8"?>
 <p:sld xmlns:a="http://schemas.openxmlformats.org/drawingml/2006/main" xmlns:r="http://schemas.openxmlformats.org/officeDocument/2006/relationships" xmlns:p="http://schemas.openxmlformats.org/presentationml/2006/main">
   <p:cSld>
     <p:spTree>
@@ -9264,7 +9393,7 @@
 </p:sld>
 </file>
 
-<file path=ppt/slides/slide17.xml><?xml version="1.0" encoding="utf-8"?>
+<file path=ppt/slides/slide18.xml><?xml version="1.0" encoding="utf-8"?>
 <p:sld xmlns:a="http://schemas.openxmlformats.org/drawingml/2006/main" xmlns:r="http://schemas.openxmlformats.org/officeDocument/2006/relationships" xmlns:p="http://schemas.openxmlformats.org/presentationml/2006/main">
   <p:cSld>
     <p:spTree>
@@ -10448,7 +10577,7 @@
 </p:sld>
 </file>
 
-<file path=ppt/slides/slide18.xml><?xml version="1.0" encoding="utf-8"?>
+<file path=ppt/slides/slide19.xml><?xml version="1.0" encoding="utf-8"?>
 <p:sld xmlns:a="http://schemas.openxmlformats.org/drawingml/2006/main" xmlns:r="http://schemas.openxmlformats.org/officeDocument/2006/relationships" xmlns:p="http://schemas.openxmlformats.org/presentationml/2006/main">
   <p:cSld>
     <p:spTree>
@@ -11519,7 +11648,162 @@
 </p:sld>
 </file>
 
-<file path=ppt/slides/slide19.xml><?xml version="1.0" encoding="utf-8"?>
+<file path=ppt/slides/slide2.xml><?xml version="1.0" encoding="utf-8"?>
+<p:sld xmlns:a="http://schemas.openxmlformats.org/drawingml/2006/main" xmlns:r="http://schemas.openxmlformats.org/officeDocument/2006/relationships" xmlns:p="http://schemas.openxmlformats.org/presentationml/2006/main">
+  <p:cSld>
+    <p:spTree>
+      <p:nvGrpSpPr>
+        <p:cNvPr id="1" name="">
+          <a:extLst>
+            <a:ext uri="{FF2B5EF4-FFF2-40B4-BE49-F238E27FC236}">
+              <a16:creationId xmlns:a16="http://schemas.microsoft.com/office/drawing/2014/main" id="{42FF8969-F776-4DDE-7829-6B307E6E7C9D}"/>
+            </a:ext>
+          </a:extLst>
+        </p:cNvPr>
+        <p:cNvGrpSpPr/>
+        <p:nvPr/>
+      </p:nvGrpSpPr>
+      <p:grpSpPr>
+        <a:xfrm>
+          <a:off x="0" y="0"/>
+          <a:ext cx="0" cy="0"/>
+          <a:chOff x="0" y="0"/>
+          <a:chExt cx="0" cy="0"/>
+        </a:xfrm>
+      </p:grpSpPr>
+      <p:sp>
+        <p:nvSpPr>
+          <p:cNvPr id="2" name="Titel 1">
+            <a:extLst>
+              <a:ext uri="{FF2B5EF4-FFF2-40B4-BE49-F238E27FC236}">
+                <a16:creationId xmlns:a16="http://schemas.microsoft.com/office/drawing/2014/main" id="{AF7D7271-1E1B-0051-7303-68D2DD132AD4}"/>
+              </a:ext>
+            </a:extLst>
+          </p:cNvPr>
+          <p:cNvSpPr>
+            <a:spLocks noGrp="1"/>
+          </p:cNvSpPr>
+          <p:nvPr>
+            <p:ph type="ctrTitle"/>
+          </p:nvPr>
+        </p:nvSpPr>
+        <p:spPr>
+          <a:xfrm>
+            <a:off x="970156" y="2857500"/>
+            <a:ext cx="7632824" cy="4089620"/>
+          </a:xfrm>
+        </p:spPr>
+        <p:txBody>
+          <a:bodyPr anchor="t" anchorCtr="0">
+            <a:normAutofit/>
+          </a:bodyPr>
+          <a:lstStyle/>
+          <a:p>
+            <a:pPr algn="l"/>
+            <a:r>
+              <a:rPr lang="da-DK" sz="2000" dirty="0">
+                <a:latin typeface="Helvetica" charset="0"/>
+                <a:ea typeface="Helvetica" charset="0"/>
+                <a:cs typeface="Helvetica" charset="0"/>
+              </a:rPr>
+              <a:t>Der er tit begrebsforvirring om:</a:t>
+            </a:r>
+            <a:br>
+              <a:rPr lang="da-DK" sz="3200" dirty="0">
+                <a:latin typeface="Helvetica" charset="0"/>
+                <a:ea typeface="Helvetica" charset="0"/>
+                <a:cs typeface="Helvetica" charset="0"/>
+              </a:rPr>
+            </a:br>
+            <a:br>
+              <a:rPr lang="da-DK" sz="3200" dirty="0">
+                <a:latin typeface="Helvetica" charset="0"/>
+                <a:ea typeface="Helvetica" charset="0"/>
+                <a:cs typeface="Helvetica" charset="0"/>
+              </a:rPr>
+            </a:br>
+            <a:r>
+              <a:rPr lang="da-DK" sz="3200" b="1" dirty="0">
+                <a:solidFill>
+                  <a:schemeClr val="accent2"/>
+                </a:solidFill>
+                <a:latin typeface="Helvetica" charset="0"/>
+                <a:ea typeface="Helvetica" charset="0"/>
+                <a:cs typeface="Helvetica" charset="0"/>
+              </a:rPr>
+              <a:t>UX, UI &amp; </a:t>
+            </a:r>
+            <a:r>
+              <a:rPr lang="da-DK" sz="3200" b="1" dirty="0" err="1">
+                <a:solidFill>
+                  <a:schemeClr val="accent2"/>
+                </a:solidFill>
+                <a:latin typeface="Helvetica" charset="0"/>
+                <a:ea typeface="Helvetica" charset="0"/>
+                <a:cs typeface="Helvetica" charset="0"/>
+              </a:rPr>
+              <a:t>Usability</a:t>
+            </a:r>
+            <a:br>
+              <a:rPr lang="da-DK" sz="2400" b="1" dirty="0">
+                <a:latin typeface="Helvetica" charset="0"/>
+                <a:ea typeface="Helvetica" charset="0"/>
+                <a:cs typeface="Helvetica" charset="0"/>
+              </a:rPr>
+            </a:br>
+            <a:endParaRPr lang="da-DK" sz="2000" dirty="0">
+              <a:solidFill>
+                <a:schemeClr val="accent5"/>
+              </a:solidFill>
+              <a:latin typeface="Helvetica" charset="0"/>
+            </a:endParaRPr>
+          </a:p>
+        </p:txBody>
+      </p:sp>
+      <p:pic>
+        <p:nvPicPr>
+          <p:cNvPr id="4" name="Billede 3" descr="Et billede, der indeholder tekst, clipart&#10;&#10;Automatisk genereret beskrivelse">
+            <a:extLst>
+              <a:ext uri="{FF2B5EF4-FFF2-40B4-BE49-F238E27FC236}">
+                <a16:creationId xmlns:a16="http://schemas.microsoft.com/office/drawing/2014/main" id="{3F140F6C-21AD-AF5A-2887-54765D0A5E1A}"/>
+              </a:ext>
+            </a:extLst>
+          </p:cNvPr>
+          <p:cNvPicPr>
+            <a:picLocks noChangeAspect="1"/>
+          </p:cNvPicPr>
+          <p:nvPr/>
+        </p:nvPicPr>
+        <p:blipFill>
+          <a:blip r:embed="rId3"/>
+          <a:stretch>
+            <a:fillRect/>
+          </a:stretch>
+        </p:blipFill>
+        <p:spPr>
+          <a:xfrm>
+            <a:off x="8079129" y="101873"/>
+            <a:ext cx="960698" cy="267714"/>
+          </a:xfrm>
+          <a:prstGeom prst="rect">
+            <a:avLst/>
+          </a:prstGeom>
+        </p:spPr>
+      </p:pic>
+    </p:spTree>
+    <p:extLst>
+      <p:ext uri="{BB962C8B-B14F-4D97-AF65-F5344CB8AC3E}">
+        <p14:creationId xmlns:p14="http://schemas.microsoft.com/office/powerpoint/2010/main" val="4037421680"/>
+      </p:ext>
+    </p:extLst>
+  </p:cSld>
+  <p:clrMapOvr>
+    <a:masterClrMapping/>
+  </p:clrMapOvr>
+</p:sld>
+</file>
+
+<file path=ppt/slides/slide20.xml><?xml version="1.0" encoding="utf-8"?>
 <p:sld xmlns:a="http://schemas.openxmlformats.org/drawingml/2006/main" xmlns:r="http://schemas.openxmlformats.org/officeDocument/2006/relationships" xmlns:p="http://schemas.openxmlformats.org/presentationml/2006/main">
   <p:cSld>
     <p:spTree>
@@ -12325,162 +12609,7 @@
 </p:sld>
 </file>
 
-<file path=ppt/slides/slide2.xml><?xml version="1.0" encoding="utf-8"?>
-<p:sld xmlns:a="http://schemas.openxmlformats.org/drawingml/2006/main" xmlns:r="http://schemas.openxmlformats.org/officeDocument/2006/relationships" xmlns:p="http://schemas.openxmlformats.org/presentationml/2006/main">
-  <p:cSld>
-    <p:spTree>
-      <p:nvGrpSpPr>
-        <p:cNvPr id="1" name="">
-          <a:extLst>
-            <a:ext uri="{FF2B5EF4-FFF2-40B4-BE49-F238E27FC236}">
-              <a16:creationId xmlns:a16="http://schemas.microsoft.com/office/drawing/2014/main" id="{42FF8969-F776-4DDE-7829-6B307E6E7C9D}"/>
-            </a:ext>
-          </a:extLst>
-        </p:cNvPr>
-        <p:cNvGrpSpPr/>
-        <p:nvPr/>
-      </p:nvGrpSpPr>
-      <p:grpSpPr>
-        <a:xfrm>
-          <a:off x="0" y="0"/>
-          <a:ext cx="0" cy="0"/>
-          <a:chOff x="0" y="0"/>
-          <a:chExt cx="0" cy="0"/>
-        </a:xfrm>
-      </p:grpSpPr>
-      <p:sp>
-        <p:nvSpPr>
-          <p:cNvPr id="2" name="Titel 1">
-            <a:extLst>
-              <a:ext uri="{FF2B5EF4-FFF2-40B4-BE49-F238E27FC236}">
-                <a16:creationId xmlns:a16="http://schemas.microsoft.com/office/drawing/2014/main" id="{AF7D7271-1E1B-0051-7303-68D2DD132AD4}"/>
-              </a:ext>
-            </a:extLst>
-          </p:cNvPr>
-          <p:cNvSpPr>
-            <a:spLocks noGrp="1"/>
-          </p:cNvSpPr>
-          <p:nvPr>
-            <p:ph type="ctrTitle"/>
-          </p:nvPr>
-        </p:nvSpPr>
-        <p:spPr>
-          <a:xfrm>
-            <a:off x="970156" y="2857500"/>
-            <a:ext cx="7632824" cy="4089620"/>
-          </a:xfrm>
-        </p:spPr>
-        <p:txBody>
-          <a:bodyPr anchor="t" anchorCtr="0">
-            <a:normAutofit/>
-          </a:bodyPr>
-          <a:lstStyle/>
-          <a:p>
-            <a:pPr algn="l"/>
-            <a:r>
-              <a:rPr lang="da-DK" sz="2000" dirty="0">
-                <a:latin typeface="Helvetica" charset="0"/>
-                <a:ea typeface="Helvetica" charset="0"/>
-                <a:cs typeface="Helvetica" charset="0"/>
-              </a:rPr>
-              <a:t>Der er tit begrebsforvirring om:</a:t>
-            </a:r>
-            <a:br>
-              <a:rPr lang="da-DK" sz="3200" dirty="0">
-                <a:latin typeface="Helvetica" charset="0"/>
-                <a:ea typeface="Helvetica" charset="0"/>
-                <a:cs typeface="Helvetica" charset="0"/>
-              </a:rPr>
-            </a:br>
-            <a:br>
-              <a:rPr lang="da-DK" sz="3200" dirty="0">
-                <a:latin typeface="Helvetica" charset="0"/>
-                <a:ea typeface="Helvetica" charset="0"/>
-                <a:cs typeface="Helvetica" charset="0"/>
-              </a:rPr>
-            </a:br>
-            <a:r>
-              <a:rPr lang="da-DK" sz="3200" b="1" dirty="0">
-                <a:solidFill>
-                  <a:schemeClr val="accent2"/>
-                </a:solidFill>
-                <a:latin typeface="Helvetica" charset="0"/>
-                <a:ea typeface="Helvetica" charset="0"/>
-                <a:cs typeface="Helvetica" charset="0"/>
-              </a:rPr>
-              <a:t>UX, UI &amp; </a:t>
-            </a:r>
-            <a:r>
-              <a:rPr lang="da-DK" sz="3200" b="1" dirty="0" err="1">
-                <a:solidFill>
-                  <a:schemeClr val="accent2"/>
-                </a:solidFill>
-                <a:latin typeface="Helvetica" charset="0"/>
-                <a:ea typeface="Helvetica" charset="0"/>
-                <a:cs typeface="Helvetica" charset="0"/>
-              </a:rPr>
-              <a:t>Usability</a:t>
-            </a:r>
-            <a:br>
-              <a:rPr lang="da-DK" sz="2400" b="1" dirty="0">
-                <a:latin typeface="Helvetica" charset="0"/>
-                <a:ea typeface="Helvetica" charset="0"/>
-                <a:cs typeface="Helvetica" charset="0"/>
-              </a:rPr>
-            </a:br>
-            <a:endParaRPr lang="da-DK" sz="2000" dirty="0">
-              <a:solidFill>
-                <a:schemeClr val="accent5"/>
-              </a:solidFill>
-              <a:latin typeface="Helvetica" charset="0"/>
-            </a:endParaRPr>
-          </a:p>
-        </p:txBody>
-      </p:sp>
-      <p:pic>
-        <p:nvPicPr>
-          <p:cNvPr id="4" name="Billede 3" descr="Et billede, der indeholder tekst, clipart&#10;&#10;Automatisk genereret beskrivelse">
-            <a:extLst>
-              <a:ext uri="{FF2B5EF4-FFF2-40B4-BE49-F238E27FC236}">
-                <a16:creationId xmlns:a16="http://schemas.microsoft.com/office/drawing/2014/main" id="{3F140F6C-21AD-AF5A-2887-54765D0A5E1A}"/>
-              </a:ext>
-            </a:extLst>
-          </p:cNvPr>
-          <p:cNvPicPr>
-            <a:picLocks noChangeAspect="1"/>
-          </p:cNvPicPr>
-          <p:nvPr/>
-        </p:nvPicPr>
-        <p:blipFill>
-          <a:blip r:embed="rId3"/>
-          <a:stretch>
-            <a:fillRect/>
-          </a:stretch>
-        </p:blipFill>
-        <p:spPr>
-          <a:xfrm>
-            <a:off x="8079129" y="101873"/>
-            <a:ext cx="960698" cy="267714"/>
-          </a:xfrm>
-          <a:prstGeom prst="rect">
-            <a:avLst/>
-          </a:prstGeom>
-        </p:spPr>
-      </p:pic>
-    </p:spTree>
-    <p:extLst>
-      <p:ext uri="{BB962C8B-B14F-4D97-AF65-F5344CB8AC3E}">
-        <p14:creationId xmlns:p14="http://schemas.microsoft.com/office/powerpoint/2010/main" val="4037421680"/>
-      </p:ext>
-    </p:extLst>
-  </p:cSld>
-  <p:clrMapOvr>
-    <a:masterClrMapping/>
-  </p:clrMapOvr>
-</p:sld>
-</file>
-
-<file path=ppt/slides/slide20.xml><?xml version="1.0" encoding="utf-8"?>
+<file path=ppt/slides/slide21.xml><?xml version="1.0" encoding="utf-8"?>
 <p:sld xmlns:a="http://schemas.openxmlformats.org/drawingml/2006/main" xmlns:r="http://schemas.openxmlformats.org/officeDocument/2006/relationships" xmlns:p="http://schemas.openxmlformats.org/presentationml/2006/main">
   <p:cSld>
     <p:spTree>
@@ -13264,93 +13393,6 @@
 </p:sld>
 </file>
 
-<file path=ppt/slides/slide21.xml><?xml version="1.0" encoding="utf-8"?>
-<p:sld xmlns:a="http://schemas.openxmlformats.org/drawingml/2006/main" xmlns:r="http://schemas.openxmlformats.org/officeDocument/2006/relationships" xmlns:p="http://schemas.openxmlformats.org/presentationml/2006/main">
-  <p:cSld>
-    <p:spTree>
-      <p:nvGrpSpPr>
-        <p:cNvPr id="1" name=""/>
-        <p:cNvGrpSpPr/>
-        <p:nvPr/>
-      </p:nvGrpSpPr>
-      <p:grpSpPr>
-        <a:xfrm>
-          <a:off x="0" y="0"/>
-          <a:ext cx="0" cy="0"/>
-          <a:chOff x="0" y="0"/>
-          <a:chExt cx="0" cy="0"/>
-        </a:xfrm>
-      </p:grpSpPr>
-      <p:sp>
-        <p:nvSpPr>
-          <p:cNvPr id="2" name="TextBox 5">
-            <a:extLst>
-              <a:ext uri="{FF2B5EF4-FFF2-40B4-BE49-F238E27FC236}">
-                <a16:creationId xmlns:a16="http://schemas.microsoft.com/office/drawing/2014/main" id="{B43A6403-0DE6-9DEA-4D6C-5F3DAA1A72D2}"/>
-              </a:ext>
-            </a:extLst>
-          </p:cNvPr>
-          <p:cNvSpPr txBox="1"/>
-          <p:nvPr/>
-        </p:nvSpPr>
-        <p:spPr>
-          <a:xfrm>
-            <a:off x="3276600" y="1638300"/>
-            <a:ext cx="3311136" cy="1287192"/>
-          </a:xfrm>
-          <a:prstGeom prst="rect">
-            <a:avLst/>
-          </a:prstGeom>
-        </p:spPr>
-        <p:txBody>
-          <a:bodyPr vert="horz" lIns="45720" tIns="22860" rIns="45720" bIns="22860" rtlCol="0" anchor="b">
-            <a:normAutofit/>
-          </a:bodyPr>
-          <a:lstStyle/>
-          <a:p>
-            <a:pPr>
-              <a:lnSpc>
-                <a:spcPct val="90000"/>
-              </a:lnSpc>
-              <a:spcBef>
-                <a:spcPct val="0"/>
-              </a:spcBef>
-              <a:spcAft>
-                <a:spcPts val="300"/>
-              </a:spcAft>
-            </a:pPr>
-            <a:r>
-              <a:rPr lang="en-US" sz="4200" dirty="0" err="1">
-                <a:latin typeface="+mj-lt"/>
-                <a:ea typeface="+mj-ea"/>
-                <a:cs typeface="+mj-cs"/>
-              </a:rPr>
-              <a:t>Udviklings</a:t>
-            </a:r>
-            <a:r>
-              <a:rPr lang="en-US" sz="4200" dirty="0">
-                <a:latin typeface="+mj-lt"/>
-                <a:ea typeface="+mj-ea"/>
-                <a:cs typeface="+mj-cs"/>
-              </a:rPr>
-              <a:t> del Pensum</a:t>
-            </a:r>
-          </a:p>
-        </p:txBody>
-      </p:sp>
-    </p:spTree>
-    <p:extLst>
-      <p:ext uri="{BB962C8B-B14F-4D97-AF65-F5344CB8AC3E}">
-        <p14:creationId xmlns:p14="http://schemas.microsoft.com/office/powerpoint/2010/main" val="1332229716"/>
-      </p:ext>
-    </p:extLst>
-  </p:cSld>
-  <p:clrMapOvr>
-    <a:masterClrMapping/>
-  </p:clrMapOvr>
-</p:sld>
-</file>
-
 <file path=ppt/slides/slide22.xml><?xml version="1.0" encoding="utf-8"?>
 <p:sld xmlns:a="http://schemas.openxmlformats.org/drawingml/2006/main" xmlns:r="http://schemas.openxmlformats.org/officeDocument/2006/relationships" xmlns:p="http://schemas.openxmlformats.org/presentationml/2006/main">
   <p:cSld>
@@ -13370,635 +13412,65 @@
       </p:grpSpPr>
       <p:sp>
         <p:nvSpPr>
-          <p:cNvPr id="2" name="Title 1">
+          <p:cNvPr id="2" name="TextBox 5">
             <a:extLst>
               <a:ext uri="{FF2B5EF4-FFF2-40B4-BE49-F238E27FC236}">
-                <a16:creationId xmlns:a16="http://schemas.microsoft.com/office/drawing/2014/main" id="{EDE2938E-8C79-1794-CD44-CBFBEE4F0C15}"/>
+                <a16:creationId xmlns:a16="http://schemas.microsoft.com/office/drawing/2014/main" id="{B43A6403-0DE6-9DEA-4D6C-5F3DAA1A72D2}"/>
               </a:ext>
             </a:extLst>
           </p:cNvPr>
-          <p:cNvSpPr>
-            <a:spLocks noGrp="1"/>
-          </p:cNvSpPr>
-          <p:nvPr>
-            <p:ph type="title"/>
-          </p:nvPr>
-        </p:nvSpPr>
-        <p:spPr/>
-        <p:txBody>
-          <a:bodyPr>
-            <a:normAutofit fontScale="90000"/>
-          </a:bodyPr>
-          <a:lstStyle/>
-          <a:p>
-            <a:br>
-              <a:rPr lang="en-GB" dirty="0">
-                <a:effectLst/>
-                <a:latin typeface="Helvetica" pitchFamily="2" charset="0"/>
-              </a:rPr>
-            </a:br>
-            <a:br>
-              <a:rPr lang="en-GB" dirty="0">
-                <a:effectLst/>
-                <a:latin typeface="Helvetica" pitchFamily="2" charset="0"/>
-              </a:rPr>
-            </a:br>
-            <a:br>
-              <a:rPr lang="en-GB" dirty="0">
-                <a:effectLst/>
-                <a:latin typeface="Helvetica" pitchFamily="2" charset="0"/>
-              </a:rPr>
-            </a:br>
-            <a:br>
-              <a:rPr lang="en-GB" dirty="0">
-                <a:effectLst/>
-                <a:latin typeface="Helvetica" pitchFamily="2" charset="0"/>
-              </a:rPr>
-            </a:br>
-            <a:br>
-              <a:rPr lang="en-GB" dirty="0">
-                <a:effectLst/>
-                <a:latin typeface="Helvetica" pitchFamily="2" charset="0"/>
-              </a:rPr>
-            </a:br>
-            <a:br>
-              <a:rPr lang="en-GB" dirty="0">
-                <a:effectLst/>
-                <a:latin typeface="Helvetica" pitchFamily="2" charset="0"/>
-              </a:rPr>
-            </a:br>
-            <a:br>
-              <a:rPr lang="en-GB" dirty="0">
-                <a:effectLst/>
-                <a:latin typeface="Helvetica" pitchFamily="2" charset="0"/>
-              </a:rPr>
-            </a:br>
-            <a:br>
-              <a:rPr lang="en-GB" dirty="0">
-                <a:effectLst/>
-                <a:latin typeface="Helvetica" pitchFamily="2" charset="0"/>
-              </a:rPr>
-            </a:br>
-            <a:br>
-              <a:rPr lang="en-GB" dirty="0">
-                <a:effectLst/>
-                <a:latin typeface="Helvetica" pitchFamily="2" charset="0"/>
-              </a:rPr>
-            </a:br>
-            <a:br>
-              <a:rPr lang="en-GB" dirty="0">
-                <a:effectLst/>
-                <a:latin typeface="Helvetica" pitchFamily="2" charset="0"/>
-              </a:rPr>
-            </a:br>
-            <a:br>
-              <a:rPr lang="en-GB" dirty="0">
-                <a:effectLst/>
-                <a:latin typeface="Helvetica" pitchFamily="2" charset="0"/>
-              </a:rPr>
-            </a:br>
-            <a:br>
-              <a:rPr lang="en-GB" dirty="0">
-                <a:effectLst/>
-                <a:latin typeface="Helvetica" pitchFamily="2" charset="0"/>
-              </a:rPr>
-            </a:br>
-            <a:br>
-              <a:rPr lang="en-GB" dirty="0">
-                <a:effectLst/>
-                <a:latin typeface="Helvetica" pitchFamily="2" charset="0"/>
-              </a:rPr>
-            </a:br>
-            <a:br>
-              <a:rPr lang="en-GB" dirty="0">
-                <a:effectLst/>
-                <a:latin typeface="Helvetica" pitchFamily="2" charset="0"/>
-              </a:rPr>
-            </a:br>
-            <a:br>
-              <a:rPr lang="en-GB" dirty="0">
-                <a:effectLst/>
-                <a:latin typeface="Helvetica" pitchFamily="2" charset="0"/>
-              </a:rPr>
-            </a:br>
-            <a:br>
-              <a:rPr lang="en-GB" dirty="0">
-                <a:effectLst/>
-                <a:latin typeface="Helvetica" pitchFamily="2" charset="0"/>
-              </a:rPr>
-            </a:br>
-            <a:br>
-              <a:rPr lang="en-GB" dirty="0">
-                <a:effectLst/>
-                <a:latin typeface="Helvetica" pitchFamily="2" charset="0"/>
-              </a:rPr>
-            </a:br>
-            <a:br>
-              <a:rPr lang="en-GB" dirty="0">
-                <a:effectLst/>
-                <a:latin typeface="Helvetica" pitchFamily="2" charset="0"/>
-              </a:rPr>
-            </a:br>
-            <a:br>
-              <a:rPr lang="en-GB" dirty="0">
-                <a:effectLst/>
-                <a:latin typeface="Helvetica" pitchFamily="2" charset="0"/>
-              </a:rPr>
-            </a:br>
-            <a:br>
-              <a:rPr lang="en-GB" dirty="0">
-                <a:effectLst/>
-                <a:latin typeface="Helvetica" pitchFamily="2" charset="0"/>
-              </a:rPr>
-            </a:br>
-            <a:br>
-              <a:rPr lang="en-GB" dirty="0">
-                <a:effectLst/>
-                <a:latin typeface="Helvetica" pitchFamily="2" charset="0"/>
-              </a:rPr>
-            </a:br>
-            <a:br>
-              <a:rPr lang="en-GB" dirty="0">
-                <a:effectLst/>
-                <a:latin typeface="Helvetica" pitchFamily="2" charset="0"/>
-              </a:rPr>
-            </a:br>
-            <a:br>
-              <a:rPr lang="en-GB" dirty="0">
-                <a:effectLst/>
-                <a:latin typeface="Helvetica" pitchFamily="2" charset="0"/>
-              </a:rPr>
-            </a:br>
-            <a:br>
-              <a:rPr lang="en-GB" dirty="0">
-                <a:effectLst/>
-                <a:latin typeface="Helvetica" pitchFamily="2" charset="0"/>
-              </a:rPr>
-            </a:br>
-            <a:r>
-              <a:rPr lang="en-GB" b="1" dirty="0">
-                <a:effectLst/>
-                <a:latin typeface="Helvetica" pitchFamily="2" charset="0"/>
-              </a:rPr>
-              <a:t>HTML 5-viden</a:t>
-            </a:r>
-            <a:br>
-              <a:rPr lang="en-GB" dirty="0">
-                <a:effectLst/>
-                <a:latin typeface="Helvetica" pitchFamily="2" charset="0"/>
-              </a:rPr>
-            </a:br>
-            <a:endParaRPr lang="en-DK" dirty="0"/>
-          </a:p>
-        </p:txBody>
-      </p:sp>
-      <p:sp>
-        <p:nvSpPr>
-          <p:cNvPr id="3" name="Content Placeholder 2">
-            <a:extLst>
-              <a:ext uri="{FF2B5EF4-FFF2-40B4-BE49-F238E27FC236}">
-                <a16:creationId xmlns:a16="http://schemas.microsoft.com/office/drawing/2014/main" id="{3F411D33-356C-8BF0-D916-74697BDE6CDB}"/>
-              </a:ext>
-            </a:extLst>
-          </p:cNvPr>
-          <p:cNvSpPr>
-            <a:spLocks noGrp="1"/>
-          </p:cNvSpPr>
-          <p:nvPr>
-            <p:ph idx="1"/>
-          </p:nvPr>
-        </p:nvSpPr>
-        <p:spPr/>
-        <p:txBody>
-          <a:bodyPr>
+          <p:cNvSpPr txBox="1"/>
+          <p:nvPr/>
+        </p:nvSpPr>
+        <p:spPr>
+          <a:xfrm>
+            <a:off x="3276600" y="1638300"/>
+            <a:ext cx="3311136" cy="1287192"/>
+          </a:xfrm>
+          <a:prstGeom prst="rect">
+            <a:avLst/>
+          </a:prstGeom>
+        </p:spPr>
+        <p:txBody>
+          <a:bodyPr vert="horz" lIns="45720" tIns="22860" rIns="45720" bIns="22860" rtlCol="0" anchor="b">
             <a:normAutofit/>
           </a:bodyPr>
           <a:lstStyle/>
           <a:p>
-            <a:r>
-              <a:rPr lang="en-GB" b="0" i="0" dirty="0" err="1">
-                <a:effectLst/>
-                <a:latin typeface="Söhne"/>
-              </a:rPr>
-              <a:t>Lær</a:t>
-            </a:r>
-            <a:r>
-              <a:rPr lang="en-GB" b="0" i="0" dirty="0">
-                <a:effectLst/>
-                <a:latin typeface="Söhne"/>
-              </a:rPr>
-              <a:t>  HTML-</a:t>
-            </a:r>
-            <a:r>
-              <a:rPr lang="en-GB" b="0" i="0" dirty="0" err="1">
-                <a:effectLst/>
-                <a:latin typeface="Söhne"/>
-              </a:rPr>
-              <a:t>syntaksen</a:t>
-            </a:r>
-            <a:r>
-              <a:rPr lang="en-GB" b="0" i="0" dirty="0">
-                <a:effectLst/>
-                <a:latin typeface="Söhne"/>
-              </a:rPr>
-              <a:t> </a:t>
-            </a:r>
-            <a:r>
-              <a:rPr lang="en-GB" b="0" i="0" dirty="0" err="1">
-                <a:effectLst/>
-                <a:latin typeface="Söhne"/>
-              </a:rPr>
-              <a:t>til</a:t>
-            </a:r>
-            <a:r>
-              <a:rPr lang="en-GB" b="0" i="0" dirty="0">
-                <a:effectLst/>
-                <a:latin typeface="Söhne"/>
-              </a:rPr>
-              <a:t> at </a:t>
-            </a:r>
-            <a:r>
-              <a:rPr lang="en-GB" b="0" i="0" dirty="0" err="1">
-                <a:effectLst/>
-                <a:latin typeface="Söhne"/>
-              </a:rPr>
-              <a:t>strukturere</a:t>
-            </a:r>
-            <a:r>
-              <a:rPr lang="en-GB" b="0" i="0" dirty="0">
-                <a:effectLst/>
-                <a:latin typeface="Söhne"/>
-              </a:rPr>
-              <a:t> dine </a:t>
-            </a:r>
-            <a:r>
-              <a:rPr lang="en-GB" b="0" i="0" dirty="0" err="1">
-                <a:effectLst/>
-                <a:latin typeface="Söhne"/>
-              </a:rPr>
-              <a:t>hjemmesider</a:t>
-            </a:r>
-            <a:r>
-              <a:rPr lang="en-GB" b="0" i="0" dirty="0">
-                <a:effectLst/>
-                <a:latin typeface="Söhne"/>
-              </a:rPr>
-              <a:t>. </a:t>
-            </a:r>
-          </a:p>
-          <a:p>
-            <a:r>
-              <a:rPr lang="en-GB" b="0" i="0" dirty="0" err="1">
-                <a:effectLst/>
-                <a:latin typeface="Söhne"/>
-              </a:rPr>
-              <a:t>Forstå</a:t>
-            </a:r>
-            <a:r>
-              <a:rPr lang="en-GB" b="0" i="0" dirty="0">
-                <a:effectLst/>
-                <a:latin typeface="Söhne"/>
-              </a:rPr>
-              <a:t> HTML-</a:t>
-            </a:r>
-            <a:r>
-              <a:rPr lang="en-GB" b="0" i="0" dirty="0" err="1">
-                <a:effectLst/>
-                <a:latin typeface="Söhne"/>
-              </a:rPr>
-              <a:t>skabelonen</a:t>
-            </a:r>
-            <a:r>
-              <a:rPr lang="en-GB" b="0" i="0" dirty="0">
-                <a:effectLst/>
-                <a:latin typeface="Söhne"/>
-              </a:rPr>
-              <a:t> </a:t>
-            </a:r>
-            <a:r>
-              <a:rPr lang="en-GB" b="0" i="0" dirty="0" err="1">
-                <a:effectLst/>
-                <a:latin typeface="Söhne"/>
-              </a:rPr>
-              <a:t>og</a:t>
-            </a:r>
-            <a:r>
-              <a:rPr lang="en-GB" b="0" i="0" dirty="0">
-                <a:effectLst/>
-                <a:latin typeface="Söhne"/>
-              </a:rPr>
-              <a:t> HTML-</a:t>
-            </a:r>
-            <a:r>
-              <a:rPr lang="en-GB" b="0" i="0" dirty="0" err="1">
-                <a:effectLst/>
-                <a:latin typeface="Söhne"/>
-              </a:rPr>
-              <a:t>dokumenttyperne</a:t>
-            </a:r>
-            <a:r>
-              <a:rPr lang="en-GB" b="0" i="0" dirty="0">
-                <a:effectLst/>
-                <a:latin typeface="Söhne"/>
-              </a:rPr>
-              <a:t>. </a:t>
-            </a:r>
-          </a:p>
-          <a:p>
-            <a:r>
-              <a:rPr lang="en-GB" b="0" i="0" dirty="0" err="1">
-                <a:effectLst/>
-                <a:latin typeface="Söhne"/>
-              </a:rPr>
-              <a:t>Lær</a:t>
-            </a:r>
-            <a:r>
-              <a:rPr lang="en-GB" b="0" i="0" dirty="0">
-                <a:effectLst/>
-                <a:latin typeface="Söhne"/>
-              </a:rPr>
-              <a:t> at </a:t>
-            </a:r>
-            <a:r>
-              <a:rPr lang="en-GB" b="0" i="0" dirty="0" err="1">
-                <a:effectLst/>
-                <a:latin typeface="Söhne"/>
-              </a:rPr>
-              <a:t>bruge</a:t>
-            </a:r>
-            <a:r>
-              <a:rPr lang="en-GB" b="0" i="0" dirty="0">
-                <a:effectLst/>
-                <a:latin typeface="Söhne"/>
-              </a:rPr>
-              <a:t> HTML-tags </a:t>
-            </a:r>
-            <a:r>
-              <a:rPr lang="en-GB" b="0" i="0" dirty="0" err="1">
-                <a:effectLst/>
-                <a:latin typeface="Söhne"/>
-              </a:rPr>
-              <a:t>til</a:t>
-            </a:r>
-            <a:r>
-              <a:rPr lang="en-GB" b="0" i="0" dirty="0">
-                <a:effectLst/>
-                <a:latin typeface="Söhne"/>
-              </a:rPr>
-              <a:t> at </a:t>
-            </a:r>
-            <a:r>
-              <a:rPr lang="en-GB" b="0" i="0" dirty="0" err="1">
-                <a:effectLst/>
-                <a:latin typeface="Söhne"/>
-              </a:rPr>
-              <a:t>strukturere</a:t>
-            </a:r>
-            <a:r>
-              <a:rPr lang="en-GB" b="0" i="0" dirty="0">
-                <a:effectLst/>
-                <a:latin typeface="Söhne"/>
-              </a:rPr>
-              <a:t> </a:t>
-            </a:r>
-            <a:r>
-              <a:rPr lang="en-GB" b="0" i="0" dirty="0" err="1">
-                <a:effectLst/>
-                <a:latin typeface="Söhne"/>
-              </a:rPr>
-              <a:t>overskrifter</a:t>
-            </a:r>
-            <a:r>
-              <a:rPr lang="en-GB" b="0" i="0" dirty="0">
-                <a:effectLst/>
-                <a:latin typeface="Söhne"/>
-              </a:rPr>
-              <a:t>, </a:t>
-            </a:r>
-            <a:r>
-              <a:rPr lang="en-GB" b="0" i="0" dirty="0" err="1">
-                <a:effectLst/>
-                <a:latin typeface="Söhne"/>
-              </a:rPr>
-              <a:t>afsnit</a:t>
-            </a:r>
-            <a:r>
-              <a:rPr lang="en-GB" b="0" i="0" dirty="0">
-                <a:effectLst/>
-                <a:latin typeface="Söhne"/>
-              </a:rPr>
-              <a:t>. </a:t>
-            </a:r>
-          </a:p>
-          <a:p>
-            <a:r>
-              <a:rPr lang="en-GB" b="0" i="0" dirty="0" err="1">
-                <a:effectLst/>
-                <a:latin typeface="Söhne"/>
-              </a:rPr>
-              <a:t>Skab</a:t>
-            </a:r>
-            <a:r>
-              <a:rPr lang="en-GB" b="0" i="0" dirty="0">
-                <a:effectLst/>
-                <a:latin typeface="Söhne"/>
-              </a:rPr>
-              <a:t> </a:t>
-            </a:r>
-            <a:r>
-              <a:rPr lang="en-GB" b="0" i="0" dirty="0" err="1">
-                <a:effectLst/>
-                <a:latin typeface="Söhne"/>
-              </a:rPr>
-              <a:t>flersidede</a:t>
-            </a:r>
-            <a:r>
-              <a:rPr lang="en-GB" b="0" i="0" dirty="0">
-                <a:effectLst/>
-                <a:latin typeface="Söhne"/>
-              </a:rPr>
-              <a:t> </a:t>
-            </a:r>
-            <a:r>
-              <a:rPr lang="en-GB" b="0" i="0" dirty="0" err="1">
-                <a:effectLst/>
-                <a:latin typeface="Söhne"/>
-              </a:rPr>
-              <a:t>hjemmesider</a:t>
-            </a:r>
-            <a:r>
-              <a:rPr lang="en-GB" b="0" i="0" dirty="0">
-                <a:effectLst/>
-                <a:latin typeface="Söhne"/>
-              </a:rPr>
-              <a:t>. </a:t>
-            </a:r>
-          </a:p>
-          <a:p>
-            <a:r>
-              <a:rPr lang="en-GB" b="0" i="0" dirty="0" err="1">
-                <a:effectLst/>
-                <a:latin typeface="Söhne"/>
-              </a:rPr>
-              <a:t>Lær</a:t>
-            </a:r>
-            <a:r>
-              <a:rPr lang="en-GB" b="0" i="0" dirty="0">
-                <a:effectLst/>
-                <a:latin typeface="Söhne"/>
-              </a:rPr>
-              <a:t> HTML Accessibility </a:t>
-            </a:r>
-            <a:r>
-              <a:rPr lang="en-GB" b="0" i="0" dirty="0" err="1">
-                <a:effectLst/>
-                <a:latin typeface="Söhne"/>
-              </a:rPr>
-              <a:t>bedste</a:t>
-            </a:r>
-            <a:r>
-              <a:rPr lang="en-GB" b="0" i="0" dirty="0">
-                <a:effectLst/>
-                <a:latin typeface="Söhne"/>
-              </a:rPr>
-              <a:t> </a:t>
-            </a:r>
-            <a:r>
-              <a:rPr lang="en-GB" b="0" i="0" dirty="0" err="1">
-                <a:effectLst/>
-                <a:latin typeface="Söhne"/>
-              </a:rPr>
-              <a:t>praksis</a:t>
-            </a:r>
-            <a:r>
-              <a:rPr lang="en-GB" b="0" i="0" dirty="0">
-                <a:effectLst/>
-                <a:latin typeface="Söhne"/>
-              </a:rPr>
-              <a:t>.</a:t>
-            </a:r>
-          </a:p>
-          <a:p>
-            <a:r>
-              <a:rPr lang="en-GB" dirty="0" err="1">
-                <a:latin typeface="Söhne"/>
-              </a:rPr>
-              <a:t>Lære</a:t>
-            </a:r>
-            <a:r>
-              <a:rPr lang="en-GB" dirty="0">
-                <a:latin typeface="Söhne"/>
-              </a:rPr>
-              <a:t> </a:t>
-            </a:r>
-            <a:r>
-              <a:rPr lang="en-GB" b="0" i="0" dirty="0">
-                <a:effectLst/>
-                <a:latin typeface="Söhne"/>
-              </a:rPr>
-              <a:t>HTML-</a:t>
-            </a:r>
-            <a:r>
-              <a:rPr lang="en-GB" b="0" i="0" dirty="0" err="1">
-                <a:effectLst/>
-                <a:latin typeface="Söhne"/>
-              </a:rPr>
-              <a:t>validering</a:t>
-            </a:r>
-            <a:endParaRPr lang="en-DK" dirty="0"/>
-          </a:p>
-        </p:txBody>
-      </p:sp>
-      <p:sp>
-        <p:nvSpPr>
-          <p:cNvPr id="4" name="Date Placeholder 3">
-            <a:extLst>
-              <a:ext uri="{FF2B5EF4-FFF2-40B4-BE49-F238E27FC236}">
-                <a16:creationId xmlns:a16="http://schemas.microsoft.com/office/drawing/2014/main" id="{8A25FD02-B3D5-266B-5D06-BA9347CCE032}"/>
-              </a:ext>
-            </a:extLst>
-          </p:cNvPr>
-          <p:cNvSpPr>
-            <a:spLocks noGrp="1"/>
-          </p:cNvSpPr>
-          <p:nvPr>
-            <p:ph type="dt" sz="half" idx="10"/>
-          </p:nvPr>
-        </p:nvSpPr>
-        <p:spPr/>
-        <p:txBody>
-          <a:bodyPr/>
-          <a:lstStyle/>
-          <a:p>
-            <a:fld id="{0F996519-E62D-4F8C-AE1E-36928EC7D15C}" type="datetime1">
-              <a:rPr lang="en-US" smtClean="0"/>
-              <a:t>10/12/26</a:t>
-            </a:fld>
-            <a:endParaRPr lang="en-US"/>
-          </a:p>
-        </p:txBody>
-      </p:sp>
-      <p:sp>
-        <p:nvSpPr>
-          <p:cNvPr id="5" name="Footer Placeholder 4">
-            <a:extLst>
-              <a:ext uri="{FF2B5EF4-FFF2-40B4-BE49-F238E27FC236}">
-                <a16:creationId xmlns:a16="http://schemas.microsoft.com/office/drawing/2014/main" id="{D4BE04F1-3131-AF0D-DDA8-2418379F8AD5}"/>
-              </a:ext>
-            </a:extLst>
-          </p:cNvPr>
-          <p:cNvSpPr>
-            <a:spLocks noGrp="1"/>
-          </p:cNvSpPr>
-          <p:nvPr>
-            <p:ph type="ftr" sz="quarter" idx="11"/>
-          </p:nvPr>
-        </p:nvSpPr>
-        <p:spPr/>
-        <p:txBody>
-          <a:bodyPr/>
-          <a:lstStyle/>
-          <a:p>
-            <a:r>
-              <a:rPr lang="en-US"/>
-              <a:t>Sample Footer Text</a:t>
-            </a:r>
-          </a:p>
-        </p:txBody>
-      </p:sp>
-      <p:sp>
-        <p:nvSpPr>
-          <p:cNvPr id="6" name="Slide Number Placeholder 5">
-            <a:extLst>
-              <a:ext uri="{FF2B5EF4-FFF2-40B4-BE49-F238E27FC236}">
-                <a16:creationId xmlns:a16="http://schemas.microsoft.com/office/drawing/2014/main" id="{38E852E9-BB20-4BA6-4F99-2AD2DE58C34C}"/>
-              </a:ext>
-            </a:extLst>
-          </p:cNvPr>
-          <p:cNvSpPr>
-            <a:spLocks noGrp="1"/>
-          </p:cNvSpPr>
-          <p:nvPr>
-            <p:ph type="sldNum" sz="quarter" idx="12"/>
-          </p:nvPr>
-        </p:nvSpPr>
-        <p:spPr/>
-        <p:txBody>
-          <a:bodyPr/>
-          <a:lstStyle/>
-          <a:p>
-            <a:fld id="{6E91CC32-6A6B-4E2E-BBA1-6864F305DA26}" type="slidenum">
-              <a:rPr lang="en-US" smtClean="0"/>
-              <a:t>22</a:t>
-            </a:fld>
-            <a:endParaRPr lang="en-US"/>
+            <a:pPr>
+              <a:lnSpc>
+                <a:spcPct val="90000"/>
+              </a:lnSpc>
+              <a:spcBef>
+                <a:spcPct val="0"/>
+              </a:spcBef>
+              <a:spcAft>
+                <a:spcPts val="300"/>
+              </a:spcAft>
+            </a:pPr>
+            <a:r>
+              <a:rPr lang="en-US" sz="4200" dirty="0" err="1">
+                <a:latin typeface="+mj-lt"/>
+                <a:ea typeface="+mj-ea"/>
+                <a:cs typeface="+mj-cs"/>
+              </a:rPr>
+              <a:t>Udviklings</a:t>
+            </a:r>
+            <a:r>
+              <a:rPr lang="en-US" sz="4200" dirty="0">
+                <a:latin typeface="+mj-lt"/>
+                <a:ea typeface="+mj-ea"/>
+                <a:cs typeface="+mj-cs"/>
+              </a:rPr>
+              <a:t> del Pensum</a:t>
+            </a:r>
           </a:p>
         </p:txBody>
       </p:sp>
     </p:spTree>
     <p:extLst>
       <p:ext uri="{BB962C8B-B14F-4D97-AF65-F5344CB8AC3E}">
-        <p14:creationId xmlns:p14="http://schemas.microsoft.com/office/powerpoint/2010/main" val="669097731"/>
+        <p14:creationId xmlns:p14="http://schemas.microsoft.com/office/powerpoint/2010/main" val="1332229716"/>
       </p:ext>
     </p:extLst>
   </p:cSld>
@@ -14030,7 +13502,7 @@
           <p:cNvPr id="2" name="Title 1">
             <a:extLst>
               <a:ext uri="{FF2B5EF4-FFF2-40B4-BE49-F238E27FC236}">
-                <a16:creationId xmlns:a16="http://schemas.microsoft.com/office/drawing/2014/main" id="{E01BD149-D0BA-CA9A-13EE-08F8121A403F}"/>
+                <a16:creationId xmlns:a16="http://schemas.microsoft.com/office/drawing/2014/main" id="{EDE2938E-8C79-1794-CD44-CBFBEE4F0C15}"/>
               </a:ext>
             </a:extLst>
           </p:cNvPr>
@@ -14043,13 +13515,169 @@
         </p:nvSpPr>
         <p:spPr/>
         <p:txBody>
-          <a:bodyPr/>
+          <a:bodyPr>
+            <a:normAutofit fontScale="90000"/>
+          </a:bodyPr>
           <a:lstStyle/>
           <a:p>
-            <a:r>
-              <a:rPr lang="en-DK" dirty="0"/>
-              <a:t>CSS viden</a:t>
-            </a:r>
+            <a:br>
+              <a:rPr lang="en-GB" dirty="0">
+                <a:effectLst/>
+                <a:latin typeface="Helvetica" pitchFamily="2" charset="0"/>
+              </a:rPr>
+            </a:br>
+            <a:br>
+              <a:rPr lang="en-GB" dirty="0">
+                <a:effectLst/>
+                <a:latin typeface="Helvetica" pitchFamily="2" charset="0"/>
+              </a:rPr>
+            </a:br>
+            <a:br>
+              <a:rPr lang="en-GB" dirty="0">
+                <a:effectLst/>
+                <a:latin typeface="Helvetica" pitchFamily="2" charset="0"/>
+              </a:rPr>
+            </a:br>
+            <a:br>
+              <a:rPr lang="en-GB" dirty="0">
+                <a:effectLst/>
+                <a:latin typeface="Helvetica" pitchFamily="2" charset="0"/>
+              </a:rPr>
+            </a:br>
+            <a:br>
+              <a:rPr lang="en-GB" dirty="0">
+                <a:effectLst/>
+                <a:latin typeface="Helvetica" pitchFamily="2" charset="0"/>
+              </a:rPr>
+            </a:br>
+            <a:br>
+              <a:rPr lang="en-GB" dirty="0">
+                <a:effectLst/>
+                <a:latin typeface="Helvetica" pitchFamily="2" charset="0"/>
+              </a:rPr>
+            </a:br>
+            <a:br>
+              <a:rPr lang="en-GB" dirty="0">
+                <a:effectLst/>
+                <a:latin typeface="Helvetica" pitchFamily="2" charset="0"/>
+              </a:rPr>
+            </a:br>
+            <a:br>
+              <a:rPr lang="en-GB" dirty="0">
+                <a:effectLst/>
+                <a:latin typeface="Helvetica" pitchFamily="2" charset="0"/>
+              </a:rPr>
+            </a:br>
+            <a:br>
+              <a:rPr lang="en-GB" dirty="0">
+                <a:effectLst/>
+                <a:latin typeface="Helvetica" pitchFamily="2" charset="0"/>
+              </a:rPr>
+            </a:br>
+            <a:br>
+              <a:rPr lang="en-GB" dirty="0">
+                <a:effectLst/>
+                <a:latin typeface="Helvetica" pitchFamily="2" charset="0"/>
+              </a:rPr>
+            </a:br>
+            <a:br>
+              <a:rPr lang="en-GB" dirty="0">
+                <a:effectLst/>
+                <a:latin typeface="Helvetica" pitchFamily="2" charset="0"/>
+              </a:rPr>
+            </a:br>
+            <a:br>
+              <a:rPr lang="en-GB" dirty="0">
+                <a:effectLst/>
+                <a:latin typeface="Helvetica" pitchFamily="2" charset="0"/>
+              </a:rPr>
+            </a:br>
+            <a:br>
+              <a:rPr lang="en-GB" dirty="0">
+                <a:effectLst/>
+                <a:latin typeface="Helvetica" pitchFamily="2" charset="0"/>
+              </a:rPr>
+            </a:br>
+            <a:br>
+              <a:rPr lang="en-GB" dirty="0">
+                <a:effectLst/>
+                <a:latin typeface="Helvetica" pitchFamily="2" charset="0"/>
+              </a:rPr>
+            </a:br>
+            <a:br>
+              <a:rPr lang="en-GB" dirty="0">
+                <a:effectLst/>
+                <a:latin typeface="Helvetica" pitchFamily="2" charset="0"/>
+              </a:rPr>
+            </a:br>
+            <a:br>
+              <a:rPr lang="en-GB" dirty="0">
+                <a:effectLst/>
+                <a:latin typeface="Helvetica" pitchFamily="2" charset="0"/>
+              </a:rPr>
+            </a:br>
+            <a:br>
+              <a:rPr lang="en-GB" dirty="0">
+                <a:effectLst/>
+                <a:latin typeface="Helvetica" pitchFamily="2" charset="0"/>
+              </a:rPr>
+            </a:br>
+            <a:br>
+              <a:rPr lang="en-GB" dirty="0">
+                <a:effectLst/>
+                <a:latin typeface="Helvetica" pitchFamily="2" charset="0"/>
+              </a:rPr>
+            </a:br>
+            <a:br>
+              <a:rPr lang="en-GB" dirty="0">
+                <a:effectLst/>
+                <a:latin typeface="Helvetica" pitchFamily="2" charset="0"/>
+              </a:rPr>
+            </a:br>
+            <a:br>
+              <a:rPr lang="en-GB" dirty="0">
+                <a:effectLst/>
+                <a:latin typeface="Helvetica" pitchFamily="2" charset="0"/>
+              </a:rPr>
+            </a:br>
+            <a:br>
+              <a:rPr lang="en-GB" dirty="0">
+                <a:effectLst/>
+                <a:latin typeface="Helvetica" pitchFamily="2" charset="0"/>
+              </a:rPr>
+            </a:br>
+            <a:br>
+              <a:rPr lang="en-GB" dirty="0">
+                <a:effectLst/>
+                <a:latin typeface="Helvetica" pitchFamily="2" charset="0"/>
+              </a:rPr>
+            </a:br>
+            <a:br>
+              <a:rPr lang="en-GB" dirty="0">
+                <a:effectLst/>
+                <a:latin typeface="Helvetica" pitchFamily="2" charset="0"/>
+              </a:rPr>
+            </a:br>
+            <a:br>
+              <a:rPr lang="en-GB" dirty="0">
+                <a:effectLst/>
+                <a:latin typeface="Helvetica" pitchFamily="2" charset="0"/>
+              </a:rPr>
+            </a:br>
+            <a:r>
+              <a:rPr lang="en-GB" b="1" dirty="0">
+                <a:effectLst/>
+                <a:latin typeface="Helvetica" pitchFamily="2" charset="0"/>
+              </a:rPr>
+              <a:t>HTML 5-viden</a:t>
+            </a:r>
+            <a:br>
+              <a:rPr lang="en-GB" dirty="0">
+                <a:effectLst/>
+                <a:latin typeface="Helvetica" pitchFamily="2" charset="0"/>
+              </a:rPr>
+            </a:br>
+            <a:endParaRPr lang="en-DK" dirty="0"/>
           </a:p>
         </p:txBody>
       </p:sp>
@@ -14058,7 +13686,7 @@
           <p:cNvPr id="3" name="Content Placeholder 2">
             <a:extLst>
               <a:ext uri="{FF2B5EF4-FFF2-40B4-BE49-F238E27FC236}">
-                <a16:creationId xmlns:a16="http://schemas.microsoft.com/office/drawing/2014/main" id="{B0AABC1D-F81F-C651-E5C9-FFB3B50B1171}"/>
+                <a16:creationId xmlns:a16="http://schemas.microsoft.com/office/drawing/2014/main" id="{3F411D33-356C-8BF0-D916-74697BDE6CDB}"/>
               </a:ext>
             </a:extLst>
           </p:cNvPr>
@@ -14072,7 +13700,7 @@
         <p:spPr/>
         <p:txBody>
           <a:bodyPr>
-            <a:normAutofit lnSpcReduction="10000"/>
+            <a:normAutofit/>
           </a:bodyPr>
           <a:lstStyle/>
           <a:p>
@@ -14088,6 +13716,34 @@
                 <a:effectLst/>
                 <a:latin typeface="Söhne"/>
               </a:rPr>
+              <a:t>  HTML-</a:t>
+            </a:r>
+            <a:r>
+              <a:rPr lang="en-GB" b="0" i="0" dirty="0" err="1">
+                <a:effectLst/>
+                <a:latin typeface="Söhne"/>
+              </a:rPr>
+              <a:t>syntaksen</a:t>
+            </a:r>
+            <a:r>
+              <a:rPr lang="en-GB" b="0" i="0" dirty="0">
+                <a:effectLst/>
+                <a:latin typeface="Söhne"/>
+              </a:rPr>
+              <a:t> </a:t>
+            </a:r>
+            <a:r>
+              <a:rPr lang="en-GB" b="0" i="0" dirty="0" err="1">
+                <a:effectLst/>
+                <a:latin typeface="Söhne"/>
+              </a:rPr>
+              <a:t>til</a:t>
+            </a:r>
+            <a:r>
+              <a:rPr lang="en-GB" b="0" i="0" dirty="0">
+                <a:effectLst/>
+                <a:latin typeface="Söhne"/>
+              </a:rPr>
               <a:t> at </a:t>
             </a:r>
             <a:r>
@@ -14095,6 +13751,108 @@
                 <a:effectLst/>
                 <a:latin typeface="Söhne"/>
               </a:rPr>
+              <a:t>strukturere</a:t>
+            </a:r>
+            <a:r>
+              <a:rPr lang="en-GB" b="0" i="0" dirty="0">
+                <a:effectLst/>
+                <a:latin typeface="Söhne"/>
+              </a:rPr>
+              <a:t> dine </a:t>
+            </a:r>
+            <a:r>
+              <a:rPr lang="en-GB" b="0" i="0" dirty="0" err="1">
+                <a:effectLst/>
+                <a:latin typeface="Söhne"/>
+              </a:rPr>
+              <a:t>hjemmesider</a:t>
+            </a:r>
+            <a:r>
+              <a:rPr lang="en-GB" b="0" i="0" dirty="0">
+                <a:effectLst/>
+                <a:latin typeface="Söhne"/>
+              </a:rPr>
+              <a:t>. </a:t>
+            </a:r>
+          </a:p>
+          <a:p>
+            <a:r>
+              <a:rPr lang="en-GB" b="0" i="0" dirty="0" err="1">
+                <a:effectLst/>
+                <a:latin typeface="Söhne"/>
+              </a:rPr>
+              <a:t>Forstå</a:t>
+            </a:r>
+            <a:r>
+              <a:rPr lang="en-GB" b="0" i="0" dirty="0">
+                <a:effectLst/>
+                <a:latin typeface="Söhne"/>
+              </a:rPr>
+              <a:t> HTML-</a:t>
+            </a:r>
+            <a:r>
+              <a:rPr lang="en-GB" b="0" i="0" dirty="0" err="1">
+                <a:effectLst/>
+                <a:latin typeface="Söhne"/>
+              </a:rPr>
+              <a:t>skabelonen</a:t>
+            </a:r>
+            <a:r>
+              <a:rPr lang="en-GB" b="0" i="0" dirty="0">
+                <a:effectLst/>
+                <a:latin typeface="Söhne"/>
+              </a:rPr>
+              <a:t> </a:t>
+            </a:r>
+            <a:r>
+              <a:rPr lang="en-GB" b="0" i="0" dirty="0" err="1">
+                <a:effectLst/>
+                <a:latin typeface="Söhne"/>
+              </a:rPr>
+              <a:t>og</a:t>
+            </a:r>
+            <a:r>
+              <a:rPr lang="en-GB" b="0" i="0" dirty="0">
+                <a:effectLst/>
+                <a:latin typeface="Söhne"/>
+              </a:rPr>
+              <a:t> HTML-</a:t>
+            </a:r>
+            <a:r>
+              <a:rPr lang="en-GB" b="0" i="0" dirty="0" err="1">
+                <a:effectLst/>
+                <a:latin typeface="Söhne"/>
+              </a:rPr>
+              <a:t>dokumenttyperne</a:t>
+            </a:r>
+            <a:r>
+              <a:rPr lang="en-GB" b="0" i="0" dirty="0">
+                <a:effectLst/>
+                <a:latin typeface="Söhne"/>
+              </a:rPr>
+              <a:t>. </a:t>
+            </a:r>
+          </a:p>
+          <a:p>
+            <a:r>
+              <a:rPr lang="en-GB" b="0" i="0" dirty="0" err="1">
+                <a:effectLst/>
+                <a:latin typeface="Söhne"/>
+              </a:rPr>
+              <a:t>Lær</a:t>
+            </a:r>
+            <a:r>
+              <a:rPr lang="en-GB" b="0" i="0" dirty="0">
+                <a:effectLst/>
+                <a:latin typeface="Söhne"/>
+              </a:rPr>
+              <a:t> at </a:t>
+            </a:r>
+            <a:r>
+              <a:rPr lang="en-GB" b="0" i="0" dirty="0" err="1">
+                <a:effectLst/>
+                <a:latin typeface="Söhne"/>
+              </a:rPr>
               <a:t>bruge</a:t>
             </a:r>
             <a:r>
@@ -14102,20 +13860,34 @@
                 <a:effectLst/>
                 <a:latin typeface="Söhne"/>
               </a:rPr>
-              <a:t> inline, intern </a:t>
+              <a:t> HTML-tags </a:t>
             </a:r>
             <a:r>
               <a:rPr lang="en-GB" b="0" i="0" dirty="0" err="1">
                 <a:effectLst/>
                 <a:latin typeface="Söhne"/>
               </a:rPr>
-              <a:t>og</a:t>
+              <a:t>til</a:t>
             </a:r>
             <a:r>
               <a:rPr lang="en-GB" b="0" i="0" dirty="0">
                 <a:effectLst/>
                 <a:latin typeface="Söhne"/>
               </a:rPr>
+              <a:t> at </a:t>
+            </a:r>
+            <a:r>
+              <a:rPr lang="en-GB" b="0" i="0" dirty="0" err="1">
+                <a:effectLst/>
+                <a:latin typeface="Söhne"/>
+              </a:rPr>
+              <a:t>strukturere</a:t>
+            </a:r>
+            <a:r>
+              <a:rPr lang="en-GB" b="0" i="0" dirty="0">
+                <a:effectLst/>
+                <a:latin typeface="Söhne"/>
+              </a:rPr>
               <a:t> </a:t>
             </a:r>
             <a:r>
@@ -14123,22 +13895,43 @@
                 <a:effectLst/>
                 <a:latin typeface="Söhne"/>
               </a:rPr>
-              <a:t>ekstern</a:t>
+              <a:t>overskrifter</a:t>
             </a:r>
             <a:r>
               <a:rPr lang="en-GB" b="0" i="0" dirty="0">
                 <a:effectLst/>
                 <a:latin typeface="Söhne"/>
               </a:rPr>
-              <a:t> CSS.</a:t>
-            </a:r>
-          </a:p>
-          <a:p>
+              <a:t>, </a:t>
+            </a:r>
+            <a:r>
+              <a:rPr lang="en-GB" b="0" i="0" dirty="0" err="1">
+                <a:effectLst/>
+                <a:latin typeface="Söhne"/>
+              </a:rPr>
+              <a:t>afsnit</a:t>
+            </a:r>
             <a:r>
               <a:rPr lang="en-GB" b="0" i="0" dirty="0">
                 <a:effectLst/>
                 <a:latin typeface="Söhne"/>
               </a:rPr>
+              <a:t>. </a:t>
+            </a:r>
+          </a:p>
+          <a:p>
+            <a:r>
+              <a:rPr lang="en-GB" b="0" i="0" dirty="0" err="1">
+                <a:effectLst/>
+                <a:latin typeface="Söhne"/>
+              </a:rPr>
+              <a:t>Skab</a:t>
+            </a:r>
+            <a:r>
+              <a:rPr lang="en-GB" b="0" i="0" dirty="0">
+                <a:effectLst/>
+                <a:latin typeface="Söhne"/>
+              </a:rPr>
               <a:t> </a:t>
             </a:r>
             <a:r>
@@ -14146,7 +13939,7 @@
                 <a:effectLst/>
                 <a:latin typeface="Söhne"/>
               </a:rPr>
-              <a:t>Forstå</a:t>
+              <a:t>flersidede</a:t>
             </a:r>
             <a:r>
               <a:rPr lang="en-GB" b="0" i="0" dirty="0">
@@ -14160,6 +13953,36 @@
                 <a:effectLst/>
                 <a:latin typeface="Söhne"/>
               </a:rPr>
+              <a:t>hjemmesider</a:t>
+            </a:r>
+            <a:r>
+              <a:rPr lang="en-GB" b="0" i="0" dirty="0">
+                <a:effectLst/>
+                <a:latin typeface="Söhne"/>
+              </a:rPr>
+              <a:t>. </a:t>
+            </a:r>
+          </a:p>
+          <a:p>
+            <a:r>
+              <a:rPr lang="en-GB" b="0" i="0" dirty="0" err="1">
+                <a:effectLst/>
+                <a:latin typeface="Söhne"/>
+              </a:rPr>
+              <a:t>Lær</a:t>
+            </a:r>
+            <a:r>
+              <a:rPr lang="en-GB" b="0" i="0" dirty="0">
+                <a:effectLst/>
+                <a:latin typeface="Söhne"/>
+              </a:rPr>
+              <a:t> HTML Accessibility </a:t>
+            </a:r>
+            <a:r>
+              <a:rPr lang="en-GB" b="0" i="0" dirty="0" err="1">
+                <a:effectLst/>
+                <a:latin typeface="Söhne"/>
+              </a:rPr>
               <a:t>bedste</a:t>
             </a:r>
             <a:r>
@@ -14181,530 +14004,35 @@
                 <a:effectLst/>
                 <a:latin typeface="Söhne"/>
               </a:rPr>
-              <a:t> for CSS-</a:t>
+              <a:t>.</a:t>
+            </a:r>
+          </a:p>
+          <a:p>
+            <a:r>
+              <a:rPr lang="en-GB" dirty="0" err="1">
+                <a:latin typeface="Söhne"/>
+              </a:rPr>
+              <a:t>Lære</a:t>
+            </a:r>
+            <a:r>
+              <a:rPr lang="en-GB" dirty="0">
+                <a:latin typeface="Söhne"/>
+              </a:rPr>
+              <a:t> </a:t>
+            </a:r>
+            <a:r>
+              <a:rPr lang="en-GB" b="0" i="0" dirty="0">
+                <a:effectLst/>
+                <a:latin typeface="Söhne"/>
+              </a:rPr>
+              <a:t>HTML-</a:t>
             </a:r>
             <a:r>
               <a:rPr lang="en-GB" b="0" i="0" dirty="0" err="1">
                 <a:effectLst/>
                 <a:latin typeface="Söhne"/>
               </a:rPr>
-              <a:t>kodning</a:t>
-            </a:r>
-            <a:r>
-              <a:rPr lang="en-GB" b="0" i="0" dirty="0">
-                <a:effectLst/>
-                <a:latin typeface="Söhne"/>
-              </a:rPr>
-              <a:t>.</a:t>
-            </a:r>
-          </a:p>
-          <a:p>
-            <a:r>
-              <a:rPr lang="en-GB" b="0" i="0" dirty="0">
-                <a:effectLst/>
-                <a:latin typeface="Söhne"/>
-              </a:rPr>
-              <a:t> </a:t>
-            </a:r>
-            <a:r>
-              <a:rPr lang="en-GB" b="0" i="0" dirty="0" err="1">
-                <a:effectLst/>
-                <a:latin typeface="Söhne"/>
-              </a:rPr>
-              <a:t>Lær</a:t>
-            </a:r>
-            <a:r>
-              <a:rPr lang="en-GB" b="0" i="0" dirty="0">
-                <a:effectLst/>
-                <a:latin typeface="Söhne"/>
-              </a:rPr>
-              <a:t> om CSS-</a:t>
-            </a:r>
-            <a:r>
-              <a:rPr lang="en-GB" b="0" i="0" dirty="0" err="1">
-                <a:effectLst/>
-                <a:latin typeface="Söhne"/>
-              </a:rPr>
-              <a:t>specificitet</a:t>
-            </a:r>
-            <a:r>
-              <a:rPr lang="en-GB" b="0" i="0" dirty="0">
-                <a:effectLst/>
-                <a:latin typeface="Söhne"/>
-              </a:rPr>
-              <a:t> </a:t>
-            </a:r>
-            <a:r>
-              <a:rPr lang="en-GB" b="0" i="0" dirty="0" err="1">
-                <a:effectLst/>
-                <a:latin typeface="Söhne"/>
-              </a:rPr>
-              <a:t>og</a:t>
-            </a:r>
-            <a:r>
-              <a:rPr lang="en-GB" b="0" i="0" dirty="0">
-                <a:effectLst/>
-                <a:latin typeface="Söhne"/>
-              </a:rPr>
-              <a:t> </a:t>
-            </a:r>
-            <a:r>
-              <a:rPr lang="en-GB" b="0" i="0" dirty="0" err="1">
-                <a:effectLst/>
-                <a:latin typeface="Söhne"/>
-              </a:rPr>
-              <a:t>nedarvning</a:t>
-            </a:r>
-            <a:r>
-              <a:rPr lang="en-GB" b="0" i="0" dirty="0">
-                <a:effectLst/>
-                <a:latin typeface="Söhne"/>
-              </a:rPr>
-              <a:t>.</a:t>
-            </a:r>
-          </a:p>
-          <a:p>
-            <a:r>
-              <a:rPr lang="en-GB" b="0" i="0" dirty="0">
-                <a:effectLst/>
-                <a:latin typeface="Söhne"/>
-              </a:rPr>
-              <a:t> </a:t>
-            </a:r>
-            <a:r>
-              <a:rPr lang="en-GB" b="0" i="0" dirty="0" err="1">
-                <a:effectLst/>
-                <a:latin typeface="Söhne"/>
-              </a:rPr>
-              <a:t>Lær</a:t>
-            </a:r>
-            <a:r>
-              <a:rPr lang="en-GB" b="0" i="0" dirty="0">
-                <a:effectLst/>
-                <a:latin typeface="Söhne"/>
-              </a:rPr>
-              <a:t> </a:t>
-            </a:r>
-            <a:r>
-              <a:rPr lang="en-GB" b="0" i="0" dirty="0" err="1">
-                <a:effectLst/>
-                <a:latin typeface="Söhne"/>
-              </a:rPr>
-              <a:t>og</a:t>
-            </a:r>
-            <a:r>
-              <a:rPr lang="en-GB" b="0" i="0" dirty="0">
-                <a:effectLst/>
-                <a:latin typeface="Söhne"/>
-              </a:rPr>
-              <a:t> </a:t>
-            </a:r>
-            <a:r>
-              <a:rPr lang="en-GB" b="0" i="0" dirty="0" err="1">
-                <a:effectLst/>
-                <a:latin typeface="Söhne"/>
-              </a:rPr>
-              <a:t>forstå</a:t>
-            </a:r>
-            <a:r>
-              <a:rPr lang="en-GB" b="0" i="0" dirty="0">
-                <a:effectLst/>
-                <a:latin typeface="Söhne"/>
-              </a:rPr>
-              <a:t> CSS-box model.</a:t>
-            </a:r>
-          </a:p>
-          <a:p>
-            <a:r>
-              <a:rPr lang="en-GB" b="0" i="0" dirty="0">
-                <a:effectLst/>
-                <a:latin typeface="Söhne"/>
-              </a:rPr>
-              <a:t> </a:t>
-            </a:r>
-            <a:r>
-              <a:rPr lang="en-GB" b="0" i="0" dirty="0" err="1">
-                <a:effectLst/>
-                <a:latin typeface="Söhne"/>
-              </a:rPr>
-              <a:t>Lær</a:t>
-            </a:r>
-            <a:r>
-              <a:rPr lang="en-GB" b="0" i="0" dirty="0">
-                <a:effectLst/>
-                <a:latin typeface="Söhne"/>
-              </a:rPr>
-              <a:t> at </a:t>
-            </a:r>
-            <a:r>
-              <a:rPr lang="en-GB" b="0" i="0" dirty="0" err="1">
-                <a:effectLst/>
-                <a:latin typeface="Söhne"/>
-              </a:rPr>
-              <a:t>bruge</a:t>
-            </a:r>
-            <a:r>
-              <a:rPr lang="en-GB" b="0" i="0" dirty="0">
-                <a:effectLst/>
-                <a:latin typeface="Söhne"/>
-              </a:rPr>
-              <a:t> </a:t>
-            </a:r>
-            <a:r>
-              <a:rPr lang="en-GB" b="0" i="0" dirty="0" err="1">
-                <a:effectLst/>
-                <a:latin typeface="Söhne"/>
-              </a:rPr>
-              <a:t>udviklerværktøjer</a:t>
-            </a:r>
-            <a:r>
-              <a:rPr lang="en-GB" b="0" i="0" dirty="0">
-                <a:effectLst/>
-                <a:latin typeface="Söhne"/>
-              </a:rPr>
-              <a:t> </a:t>
-            </a:r>
-            <a:r>
-              <a:rPr lang="en-GB" b="0" i="0" dirty="0" err="1">
-                <a:effectLst/>
-                <a:latin typeface="Söhne"/>
-              </a:rPr>
-              <a:t>til</a:t>
-            </a:r>
-            <a:r>
-              <a:rPr lang="en-GB" b="0" i="0" dirty="0">
-                <a:effectLst/>
-                <a:latin typeface="Söhne"/>
-              </a:rPr>
-              <a:t> at </a:t>
-            </a:r>
-            <a:r>
-              <a:rPr lang="en-GB" b="0" i="0" dirty="0" err="1">
-                <a:effectLst/>
-                <a:latin typeface="Söhne"/>
-              </a:rPr>
-              <a:t>inspicere</a:t>
-            </a:r>
-            <a:r>
-              <a:rPr lang="en-GB" b="0" i="0" dirty="0">
-                <a:effectLst/>
-                <a:latin typeface="Söhne"/>
-              </a:rPr>
-              <a:t> </a:t>
-            </a:r>
-            <a:r>
-              <a:rPr lang="en-GB" b="0" i="0" dirty="0" err="1">
-                <a:effectLst/>
-                <a:latin typeface="Söhne"/>
-              </a:rPr>
-              <a:t>og</a:t>
-            </a:r>
-            <a:r>
-              <a:rPr lang="en-GB" b="0" i="0" dirty="0">
-                <a:effectLst/>
-                <a:latin typeface="Söhne"/>
-              </a:rPr>
-              <a:t> </a:t>
-            </a:r>
-            <a:r>
-              <a:rPr lang="en-GB" b="0" i="0" dirty="0" err="1">
-                <a:effectLst/>
-                <a:latin typeface="Söhne"/>
-              </a:rPr>
-              <a:t>diagnosticere</a:t>
-            </a:r>
-            <a:r>
-              <a:rPr lang="en-GB" b="0" i="0" dirty="0">
-                <a:effectLst/>
-                <a:latin typeface="Söhne"/>
-              </a:rPr>
-              <a:t> CSS. </a:t>
-            </a:r>
-            <a:r>
-              <a:rPr lang="en-GB" b="0" i="0" dirty="0" err="1">
-                <a:effectLst/>
-                <a:latin typeface="Söhne"/>
-              </a:rPr>
-              <a:t>Lær</a:t>
-            </a:r>
-            <a:r>
-              <a:rPr lang="en-GB" b="0" i="0" dirty="0">
-                <a:effectLst/>
-                <a:latin typeface="Söhne"/>
-              </a:rPr>
-              <a:t> om CSS-</a:t>
-            </a:r>
-            <a:r>
-              <a:rPr lang="en-GB" b="0" i="0" dirty="0" err="1">
-                <a:effectLst/>
-                <a:latin typeface="Söhne"/>
-              </a:rPr>
-              <a:t>positionering</a:t>
-            </a:r>
-            <a:r>
-              <a:rPr lang="en-GB" b="0" i="0" dirty="0">
-                <a:effectLst/>
-                <a:latin typeface="Söhne"/>
-              </a:rPr>
-              <a:t> </a:t>
-            </a:r>
-            <a:r>
-              <a:rPr lang="en-GB" b="0" i="0" dirty="0" err="1">
-                <a:effectLst/>
-                <a:latin typeface="Söhne"/>
-              </a:rPr>
-              <a:t>og</a:t>
-            </a:r>
-            <a:r>
-              <a:rPr lang="en-GB" b="0" i="0" dirty="0">
-                <a:effectLst/>
-                <a:latin typeface="Söhne"/>
-              </a:rPr>
-              <a:t> </a:t>
-            </a:r>
-            <a:r>
-              <a:rPr lang="en-GB" b="0" i="0" dirty="0" err="1">
-                <a:effectLst/>
-                <a:latin typeface="Söhne"/>
-              </a:rPr>
-              <a:t>displayegenskaber</a:t>
-            </a:r>
-            <a:r>
-              <a:rPr lang="en-GB" b="0" i="0" dirty="0">
-                <a:effectLst/>
-                <a:latin typeface="Söhne"/>
-              </a:rPr>
-              <a:t>. </a:t>
-            </a:r>
-          </a:p>
-          <a:p>
-            <a:r>
-              <a:rPr lang="en-GB" b="0" i="0" dirty="0" err="1">
-                <a:effectLst/>
-                <a:latin typeface="Söhne"/>
-              </a:rPr>
-              <a:t>Lær</a:t>
-            </a:r>
-            <a:r>
-              <a:rPr lang="en-GB" b="0" i="0" dirty="0">
-                <a:effectLst/>
-                <a:latin typeface="Söhne"/>
-              </a:rPr>
-              <a:t> om </a:t>
-            </a:r>
-            <a:r>
-              <a:rPr lang="en-GB" b="0" i="0" dirty="0" err="1">
-                <a:effectLst/>
-                <a:latin typeface="Söhne"/>
-              </a:rPr>
-              <a:t>skrifttypetilpasning</a:t>
-            </a:r>
-            <a:r>
-              <a:rPr lang="en-GB" b="0" i="0" dirty="0">
-                <a:effectLst/>
-                <a:latin typeface="Söhne"/>
-              </a:rPr>
-              <a:t> </a:t>
-            </a:r>
-            <a:r>
-              <a:rPr lang="en-GB" b="0" i="0" dirty="0" err="1">
-                <a:effectLst/>
-                <a:latin typeface="Söhne"/>
-              </a:rPr>
-              <a:t>ved</a:t>
-            </a:r>
-            <a:r>
-              <a:rPr lang="en-GB" b="0" i="0" dirty="0">
-                <a:effectLst/>
-                <a:latin typeface="Söhne"/>
-              </a:rPr>
-              <a:t> </a:t>
-            </a:r>
-            <a:r>
-              <a:rPr lang="en-GB" b="0" i="0" dirty="0" err="1">
-                <a:effectLst/>
-                <a:latin typeface="Söhne"/>
-              </a:rPr>
-              <a:t>hjælp</a:t>
-            </a:r>
-            <a:r>
-              <a:rPr lang="en-GB" b="0" i="0" dirty="0">
-                <a:effectLst/>
-                <a:latin typeface="Söhne"/>
-              </a:rPr>
-              <a:t> </a:t>
-            </a:r>
-            <a:r>
-              <a:rPr lang="en-GB" b="0" i="0" dirty="0" err="1">
-                <a:effectLst/>
-                <a:latin typeface="Söhne"/>
-              </a:rPr>
-              <a:t>af</a:t>
-            </a:r>
-            <a:r>
-              <a:rPr lang="en-GB" b="0" i="0" dirty="0">
-                <a:effectLst/>
-                <a:latin typeface="Söhne"/>
-              </a:rPr>
-              <a:t> CSS </a:t>
-            </a:r>
-            <a:r>
-              <a:rPr lang="en-GB" b="0" i="0" dirty="0" err="1">
-                <a:effectLst/>
-                <a:latin typeface="Söhne"/>
-              </a:rPr>
-              <a:t>og</a:t>
-            </a:r>
-            <a:r>
-              <a:rPr lang="en-GB" b="0" i="0" dirty="0">
-                <a:effectLst/>
-                <a:latin typeface="Söhne"/>
-              </a:rPr>
-              <a:t> </a:t>
-            </a:r>
-            <a:r>
-              <a:rPr lang="en-GB" b="0" i="0" dirty="0" err="1">
-                <a:effectLst/>
-                <a:latin typeface="Söhne"/>
-              </a:rPr>
-              <a:t>websikre</a:t>
-            </a:r>
-            <a:r>
-              <a:rPr lang="en-GB" b="0" i="0" dirty="0">
-                <a:effectLst/>
-                <a:latin typeface="Söhne"/>
-              </a:rPr>
-              <a:t> </a:t>
-            </a:r>
-            <a:r>
-              <a:rPr lang="en-GB" b="0" i="0" dirty="0" err="1">
-                <a:effectLst/>
-                <a:latin typeface="Söhne"/>
-              </a:rPr>
-              <a:t>skrifttyper</a:t>
-            </a:r>
-            <a:r>
-              <a:rPr lang="en-GB" b="0" i="0" dirty="0">
-                <a:effectLst/>
-                <a:latin typeface="Söhne"/>
-              </a:rPr>
-              <a:t>.</a:t>
-            </a:r>
-          </a:p>
-          <a:p>
-            <a:r>
-              <a:rPr lang="en-GB" b="0" i="0" dirty="0">
-                <a:effectLst/>
-                <a:latin typeface="Söhne"/>
-              </a:rPr>
-              <a:t> Implementer </a:t>
-            </a:r>
-            <a:r>
-              <a:rPr lang="en-GB" b="0" i="0" dirty="0" err="1">
-                <a:effectLst/>
-                <a:latin typeface="Söhne"/>
-              </a:rPr>
-              <a:t>responsivitet</a:t>
-            </a:r>
-            <a:r>
-              <a:rPr lang="en-GB" b="0" i="0" dirty="0">
-                <a:effectLst/>
-                <a:latin typeface="Söhne"/>
-              </a:rPr>
-              <a:t> </a:t>
-            </a:r>
-            <a:r>
-              <a:rPr lang="en-GB" b="0" i="0" dirty="0" err="1">
-                <a:effectLst/>
-                <a:latin typeface="Söhne"/>
-              </a:rPr>
-              <a:t>ved</a:t>
-            </a:r>
-            <a:r>
-              <a:rPr lang="en-GB" b="0" i="0" dirty="0">
-                <a:effectLst/>
-                <a:latin typeface="Söhne"/>
-              </a:rPr>
-              <a:t> </a:t>
-            </a:r>
-            <a:r>
-              <a:rPr lang="en-GB" b="0" i="0" dirty="0" err="1">
-                <a:effectLst/>
-                <a:latin typeface="Söhne"/>
-              </a:rPr>
-              <a:t>hjælp</a:t>
-            </a:r>
-            <a:r>
-              <a:rPr lang="en-GB" b="0" i="0" dirty="0">
-                <a:effectLst/>
-                <a:latin typeface="Söhne"/>
-              </a:rPr>
-              <a:t> </a:t>
-            </a:r>
-            <a:r>
-              <a:rPr lang="en-GB" b="0" i="0" dirty="0" err="1">
-                <a:effectLst/>
-                <a:latin typeface="Söhne"/>
-              </a:rPr>
-              <a:t>af</a:t>
-            </a:r>
-            <a:r>
-              <a:rPr lang="en-GB" b="0" i="0" dirty="0">
-                <a:effectLst/>
-                <a:latin typeface="Söhne"/>
-              </a:rPr>
-              <a:t> CSS-media query </a:t>
-            </a:r>
-            <a:r>
-              <a:rPr lang="en-GB" b="0" i="0" dirty="0" err="1">
-                <a:effectLst/>
-                <a:latin typeface="Söhne"/>
-              </a:rPr>
-              <a:t>og</a:t>
-            </a:r>
-            <a:r>
-              <a:rPr lang="en-GB" b="0" i="0" dirty="0">
-                <a:effectLst/>
-                <a:latin typeface="Söhne"/>
-              </a:rPr>
-              <a:t> breakpoints. </a:t>
-            </a:r>
-          </a:p>
-          <a:p>
-            <a:r>
-              <a:rPr lang="en-GB" b="0" i="0" dirty="0">
-                <a:effectLst/>
-                <a:latin typeface="Söhne"/>
-              </a:rPr>
-              <a:t>CSS float- </a:t>
-            </a:r>
-            <a:r>
-              <a:rPr lang="en-GB" b="0" i="0" dirty="0" err="1">
-                <a:effectLst/>
-                <a:latin typeface="Söhne"/>
-              </a:rPr>
-              <a:t>og</a:t>
-            </a:r>
-            <a:r>
-              <a:rPr lang="en-GB" b="0" i="0" dirty="0">
-                <a:effectLst/>
-                <a:latin typeface="Söhne"/>
-              </a:rPr>
-              <a:t> clear-</a:t>
-            </a:r>
-            <a:r>
-              <a:rPr lang="en-GB" b="0" i="0" dirty="0" err="1">
-                <a:effectLst/>
-                <a:latin typeface="Söhne"/>
-              </a:rPr>
-              <a:t>egenskaber</a:t>
-            </a:r>
-            <a:r>
-              <a:rPr lang="en-GB" b="0" i="0" dirty="0">
-                <a:effectLst/>
-                <a:latin typeface="Söhne"/>
-              </a:rPr>
-              <a:t>.  </a:t>
+              <a:t>validering</a:t>
             </a:r>
             <a:endParaRPr lang="en-DK" dirty="0"/>
           </a:p>
@@ -14715,7 +14043,7 @@
           <p:cNvPr id="4" name="Date Placeholder 3">
             <a:extLst>
               <a:ext uri="{FF2B5EF4-FFF2-40B4-BE49-F238E27FC236}">
-                <a16:creationId xmlns:a16="http://schemas.microsoft.com/office/drawing/2014/main" id="{E001150C-CCE6-5B6E-2A44-A12CBB5A308F}"/>
+                <a16:creationId xmlns:a16="http://schemas.microsoft.com/office/drawing/2014/main" id="{8A25FD02-B3D5-266B-5D06-BA9347CCE032}"/>
               </a:ext>
             </a:extLst>
           </p:cNvPr>
@@ -14744,7 +14072,7 @@
           <p:cNvPr id="5" name="Footer Placeholder 4">
             <a:extLst>
               <a:ext uri="{FF2B5EF4-FFF2-40B4-BE49-F238E27FC236}">
-                <a16:creationId xmlns:a16="http://schemas.microsoft.com/office/drawing/2014/main" id="{5463F7D9-DDE6-12F7-3688-2AAB28B044FC}"/>
+                <a16:creationId xmlns:a16="http://schemas.microsoft.com/office/drawing/2014/main" id="{D4BE04F1-3131-AF0D-DDA8-2418379F8AD5}"/>
               </a:ext>
             </a:extLst>
           </p:cNvPr>
@@ -14772,7 +14100,7 @@
           <p:cNvPr id="6" name="Slide Number Placeholder 5">
             <a:extLst>
               <a:ext uri="{FF2B5EF4-FFF2-40B4-BE49-F238E27FC236}">
-                <a16:creationId xmlns:a16="http://schemas.microsoft.com/office/drawing/2014/main" id="{7BEA5A0A-2368-DDBC-29CA-81B0313605C2}"/>
+                <a16:creationId xmlns:a16="http://schemas.microsoft.com/office/drawing/2014/main" id="{38E852E9-BB20-4BA6-4F99-2AD2DE58C34C}"/>
               </a:ext>
             </a:extLst>
           </p:cNvPr>
@@ -14799,7 +14127,7 @@
     </p:spTree>
     <p:extLst>
       <p:ext uri="{BB962C8B-B14F-4D97-AF65-F5344CB8AC3E}">
-        <p14:creationId xmlns:p14="http://schemas.microsoft.com/office/powerpoint/2010/main" val="918707087"/>
+        <p14:creationId xmlns:p14="http://schemas.microsoft.com/office/powerpoint/2010/main" val="669097731"/>
       </p:ext>
     </p:extLst>
   </p:cSld>
@@ -14831,7 +14159,7 @@
           <p:cNvPr id="2" name="Title 1">
             <a:extLst>
               <a:ext uri="{FF2B5EF4-FFF2-40B4-BE49-F238E27FC236}">
-                <a16:creationId xmlns:a16="http://schemas.microsoft.com/office/drawing/2014/main" id="{CFBBE1CC-2EF4-6790-DB92-B42645235799}"/>
+                <a16:creationId xmlns:a16="http://schemas.microsoft.com/office/drawing/2014/main" id="{E01BD149-D0BA-CA9A-13EE-08F8121A403F}"/>
               </a:ext>
             </a:extLst>
           </p:cNvPr>
@@ -14849,7 +14177,7 @@
           <a:p>
             <a:r>
               <a:rPr lang="en-DK" dirty="0"/>
-              <a:t>CSS  RWD viden Flex &amp; Grid</a:t>
+              <a:t>CSS viden</a:t>
             </a:r>
           </a:p>
         </p:txBody>
@@ -14859,7 +14187,7 @@
           <p:cNvPr id="3" name="Content Placeholder 2">
             <a:extLst>
               <a:ext uri="{FF2B5EF4-FFF2-40B4-BE49-F238E27FC236}">
-                <a16:creationId xmlns:a16="http://schemas.microsoft.com/office/drawing/2014/main" id="{7EB654C5-0285-C1AC-30CB-89910134FC3E}"/>
+                <a16:creationId xmlns:a16="http://schemas.microsoft.com/office/drawing/2014/main" id="{B0AABC1D-F81F-C651-E5C9-FFB3B50B1171}"/>
               </a:ext>
             </a:extLst>
           </p:cNvPr>
@@ -14873,7 +14201,7 @@
         <p:spPr/>
         <p:txBody>
           <a:bodyPr>
-            <a:normAutofit/>
+            <a:normAutofit lnSpcReduction="10000"/>
           </a:bodyPr>
           <a:lstStyle/>
           <a:p>
@@ -14882,27 +14210,41 @@
                 <a:effectLst/>
                 <a:latin typeface="Söhne"/>
               </a:rPr>
-              <a:t>hvorfor</a:t>
+              <a:t>Lær</a:t>
             </a:r>
             <a:r>
               <a:rPr lang="en-GB" b="0" i="0" dirty="0">
                 <a:effectLst/>
                 <a:latin typeface="Söhne"/>
               </a:rPr>
-              <a:t> flexbox </a:t>
+              <a:t> at </a:t>
             </a:r>
             <a:r>
               <a:rPr lang="en-GB" b="0" i="0" dirty="0" err="1">
                 <a:effectLst/>
                 <a:latin typeface="Söhne"/>
               </a:rPr>
-              <a:t>blev</a:t>
+              <a:t>bruge</a:t>
             </a:r>
             <a:r>
               <a:rPr lang="en-GB" b="0" i="0" dirty="0">
                 <a:effectLst/>
                 <a:latin typeface="Söhne"/>
               </a:rPr>
+              <a:t> inline, intern </a:t>
+            </a:r>
+            <a:r>
+              <a:rPr lang="en-GB" b="0" i="0" dirty="0" err="1">
+                <a:effectLst/>
+                <a:latin typeface="Söhne"/>
+              </a:rPr>
+              <a:t>og</a:t>
+            </a:r>
+            <a:r>
+              <a:rPr lang="en-GB" b="0" i="0" dirty="0">
+                <a:effectLst/>
+                <a:latin typeface="Söhne"/>
+              </a:rPr>
               <a:t> </a:t>
             </a:r>
             <a:r>
@@ -14910,13 +14252,22 @@
                 <a:effectLst/>
                 <a:latin typeface="Söhne"/>
               </a:rPr>
-              <a:t>introduceret</a:t>
+              <a:t>ekstern</a:t>
             </a:r>
             <a:r>
               <a:rPr lang="en-GB" b="0" i="0" dirty="0">
                 <a:effectLst/>
                 <a:latin typeface="Söhne"/>
               </a:rPr>
+              <a:t> CSS.</a:t>
+            </a:r>
+          </a:p>
+          <a:p>
+            <a:r>
+              <a:rPr lang="en-GB" b="0" i="0" dirty="0">
+                <a:effectLst/>
+                <a:latin typeface="Söhne"/>
+              </a:rPr>
               <a:t> </a:t>
             </a:r>
             <a:r>
@@ -14924,6 +14275,229 @@
                 <a:effectLst/>
                 <a:latin typeface="Söhne"/>
               </a:rPr>
+              <a:t>Forstå</a:t>
+            </a:r>
+            <a:r>
+              <a:rPr lang="en-GB" b="0" i="0" dirty="0">
+                <a:effectLst/>
+                <a:latin typeface="Söhne"/>
+              </a:rPr>
+              <a:t> </a:t>
+            </a:r>
+            <a:r>
+              <a:rPr lang="en-GB" b="0" i="0" dirty="0" err="1">
+                <a:effectLst/>
+                <a:latin typeface="Söhne"/>
+              </a:rPr>
+              <a:t>bedste</a:t>
+            </a:r>
+            <a:r>
+              <a:rPr lang="en-GB" b="0" i="0" dirty="0">
+                <a:effectLst/>
+                <a:latin typeface="Söhne"/>
+              </a:rPr>
+              <a:t> </a:t>
+            </a:r>
+            <a:r>
+              <a:rPr lang="en-GB" b="0" i="0" dirty="0" err="1">
+                <a:effectLst/>
+                <a:latin typeface="Söhne"/>
+              </a:rPr>
+              <a:t>praksis</a:t>
+            </a:r>
+            <a:r>
+              <a:rPr lang="en-GB" b="0" i="0" dirty="0">
+                <a:effectLst/>
+                <a:latin typeface="Söhne"/>
+              </a:rPr>
+              <a:t> for CSS-</a:t>
+            </a:r>
+            <a:r>
+              <a:rPr lang="en-GB" b="0" i="0" dirty="0" err="1">
+                <a:effectLst/>
+                <a:latin typeface="Söhne"/>
+              </a:rPr>
+              <a:t>kodning</a:t>
+            </a:r>
+            <a:r>
+              <a:rPr lang="en-GB" b="0" i="0" dirty="0">
+                <a:effectLst/>
+                <a:latin typeface="Söhne"/>
+              </a:rPr>
+              <a:t>.</a:t>
+            </a:r>
+          </a:p>
+          <a:p>
+            <a:r>
+              <a:rPr lang="en-GB" b="0" i="0" dirty="0">
+                <a:effectLst/>
+                <a:latin typeface="Söhne"/>
+              </a:rPr>
+              <a:t> </a:t>
+            </a:r>
+            <a:r>
+              <a:rPr lang="en-GB" b="0" i="0" dirty="0" err="1">
+                <a:effectLst/>
+                <a:latin typeface="Söhne"/>
+              </a:rPr>
+              <a:t>Lær</a:t>
+            </a:r>
+            <a:r>
+              <a:rPr lang="en-GB" b="0" i="0" dirty="0">
+                <a:effectLst/>
+                <a:latin typeface="Söhne"/>
+              </a:rPr>
+              <a:t> om CSS-</a:t>
+            </a:r>
+            <a:r>
+              <a:rPr lang="en-GB" b="0" i="0" dirty="0" err="1">
+                <a:effectLst/>
+                <a:latin typeface="Söhne"/>
+              </a:rPr>
+              <a:t>specificitet</a:t>
+            </a:r>
+            <a:r>
+              <a:rPr lang="en-GB" b="0" i="0" dirty="0">
+                <a:effectLst/>
+                <a:latin typeface="Söhne"/>
+              </a:rPr>
+              <a:t> </a:t>
+            </a:r>
+            <a:r>
+              <a:rPr lang="en-GB" b="0" i="0" dirty="0" err="1">
+                <a:effectLst/>
+                <a:latin typeface="Söhne"/>
+              </a:rPr>
+              <a:t>og</a:t>
+            </a:r>
+            <a:r>
+              <a:rPr lang="en-GB" b="0" i="0" dirty="0">
+                <a:effectLst/>
+                <a:latin typeface="Söhne"/>
+              </a:rPr>
+              <a:t> </a:t>
+            </a:r>
+            <a:r>
+              <a:rPr lang="en-GB" b="0" i="0" dirty="0" err="1">
+                <a:effectLst/>
+                <a:latin typeface="Söhne"/>
+              </a:rPr>
+              <a:t>nedarvning</a:t>
+            </a:r>
+            <a:r>
+              <a:rPr lang="en-GB" b="0" i="0" dirty="0">
+                <a:effectLst/>
+                <a:latin typeface="Söhne"/>
+              </a:rPr>
+              <a:t>.</a:t>
+            </a:r>
+          </a:p>
+          <a:p>
+            <a:r>
+              <a:rPr lang="en-GB" b="0" i="0" dirty="0">
+                <a:effectLst/>
+                <a:latin typeface="Söhne"/>
+              </a:rPr>
+              <a:t> </a:t>
+            </a:r>
+            <a:r>
+              <a:rPr lang="en-GB" b="0" i="0" dirty="0" err="1">
+                <a:effectLst/>
+                <a:latin typeface="Söhne"/>
+              </a:rPr>
+              <a:t>Lær</a:t>
+            </a:r>
+            <a:r>
+              <a:rPr lang="en-GB" b="0" i="0" dirty="0">
+                <a:effectLst/>
+                <a:latin typeface="Söhne"/>
+              </a:rPr>
+              <a:t> </a:t>
+            </a:r>
+            <a:r>
+              <a:rPr lang="en-GB" b="0" i="0" dirty="0" err="1">
+                <a:effectLst/>
+                <a:latin typeface="Söhne"/>
+              </a:rPr>
+              <a:t>og</a:t>
+            </a:r>
+            <a:r>
+              <a:rPr lang="en-GB" b="0" i="0" dirty="0">
+                <a:effectLst/>
+                <a:latin typeface="Söhne"/>
+              </a:rPr>
+              <a:t> </a:t>
+            </a:r>
+            <a:r>
+              <a:rPr lang="en-GB" b="0" i="0" dirty="0" err="1">
+                <a:effectLst/>
+                <a:latin typeface="Söhne"/>
+              </a:rPr>
+              <a:t>forstå</a:t>
+            </a:r>
+            <a:r>
+              <a:rPr lang="en-GB" b="0" i="0" dirty="0">
+                <a:effectLst/>
+                <a:latin typeface="Söhne"/>
+              </a:rPr>
+              <a:t> CSS-box model.</a:t>
+            </a:r>
+          </a:p>
+          <a:p>
+            <a:r>
+              <a:rPr lang="en-GB" b="0" i="0" dirty="0">
+                <a:effectLst/>
+                <a:latin typeface="Söhne"/>
+              </a:rPr>
+              <a:t> </a:t>
+            </a:r>
+            <a:r>
+              <a:rPr lang="en-GB" b="0" i="0" dirty="0" err="1">
+                <a:effectLst/>
+                <a:latin typeface="Söhne"/>
+              </a:rPr>
+              <a:t>Lær</a:t>
+            </a:r>
+            <a:r>
+              <a:rPr lang="en-GB" b="0" i="0" dirty="0">
+                <a:effectLst/>
+                <a:latin typeface="Söhne"/>
+              </a:rPr>
+              <a:t> at </a:t>
+            </a:r>
+            <a:r>
+              <a:rPr lang="en-GB" b="0" i="0" dirty="0" err="1">
+                <a:effectLst/>
+                <a:latin typeface="Söhne"/>
+              </a:rPr>
+              <a:t>bruge</a:t>
+            </a:r>
+            <a:r>
+              <a:rPr lang="en-GB" b="0" i="0" dirty="0">
+                <a:effectLst/>
+                <a:latin typeface="Söhne"/>
+              </a:rPr>
+              <a:t> </a:t>
+            </a:r>
+            <a:r>
+              <a:rPr lang="en-GB" b="0" i="0" dirty="0" err="1">
+                <a:effectLst/>
+                <a:latin typeface="Söhne"/>
+              </a:rPr>
+              <a:t>udviklerværktøjer</a:t>
+            </a:r>
+            <a:r>
+              <a:rPr lang="en-GB" b="0" i="0" dirty="0">
+                <a:effectLst/>
+                <a:latin typeface="Söhne"/>
+              </a:rPr>
+              <a:t> </a:t>
+            </a:r>
+            <a:r>
+              <a:rPr lang="en-GB" b="0" i="0" dirty="0" err="1">
+                <a:effectLst/>
+                <a:latin typeface="Söhne"/>
+              </a:rPr>
               <a:t>til</a:t>
             </a:r>
             <a:r>
@@ -14931,10 +14505,15 @@
                 <a:effectLst/>
                 <a:latin typeface="Söhne"/>
               </a:rPr>
-              <a:t> CSS.</a:t>
-            </a:r>
-          </a:p>
-          <a:p>
+              <a:t> at </a:t>
+            </a:r>
+            <a:r>
+              <a:rPr lang="en-GB" b="0" i="0" dirty="0" err="1">
+                <a:effectLst/>
+                <a:latin typeface="Söhne"/>
+              </a:rPr>
+              <a:t>inspicere</a:t>
+            </a:r>
             <a:r>
               <a:rPr lang="en-GB" b="0" i="0" dirty="0">
                 <a:effectLst/>
@@ -14947,7 +14526,7 @@
                 <a:effectLst/>
                 <a:latin typeface="Söhne"/>
               </a:rPr>
-              <a:t>Forstå</a:t>
+              <a:t>og</a:t>
             </a:r>
             <a:r>
               <a:rPr lang="en-GB" b="0" i="0" dirty="0">
@@ -14961,71 +14540,99 @@
                 <a:effectLst/>
                 <a:latin typeface="Söhne"/>
               </a:rPr>
-              <a:t>hvad</a:t>
+              <a:t>diagnosticere</a:t>
             </a:r>
             <a:r>
               <a:rPr lang="en-GB" b="0" i="0" dirty="0">
                 <a:effectLst/>
                 <a:latin typeface="Söhne"/>
               </a:rPr>
-              <a:t> der </a:t>
+              <a:t> CSS. </a:t>
             </a:r>
             <a:r>
               <a:rPr lang="en-GB" b="0" i="0" dirty="0" err="1">
                 <a:effectLst/>
                 <a:latin typeface="Söhne"/>
               </a:rPr>
-              <a:t>sker</a:t>
+              <a:t>Lær</a:t>
             </a:r>
             <a:r>
               <a:rPr lang="en-GB" b="0" i="0" dirty="0">
                 <a:effectLst/>
                 <a:latin typeface="Söhne"/>
               </a:rPr>
-              <a:t>, </a:t>
+              <a:t> om CSS-</a:t>
             </a:r>
             <a:r>
               <a:rPr lang="en-GB" b="0" i="0" dirty="0" err="1">
                 <a:effectLst/>
                 <a:latin typeface="Söhne"/>
               </a:rPr>
-              <a:t>når</a:t>
+              <a:t>positionering</a:t>
             </a:r>
             <a:r>
               <a:rPr lang="en-GB" b="0" i="0" dirty="0">
                 <a:effectLst/>
                 <a:latin typeface="Söhne"/>
               </a:rPr>
-              <a:t> display er sat </a:t>
+              <a:t> </a:t>
             </a:r>
             <a:r>
               <a:rPr lang="en-GB" b="0" i="0" dirty="0" err="1">
                 <a:effectLst/>
                 <a:latin typeface="Söhne"/>
               </a:rPr>
-              <a:t>som</a:t>
+              <a:t>og</a:t>
             </a:r>
             <a:r>
               <a:rPr lang="en-GB" b="0" i="0" dirty="0">
                 <a:effectLst/>
                 <a:latin typeface="Söhne"/>
               </a:rPr>
-              <a:t> flex. </a:t>
-            </a:r>
-          </a:p>
-          <a:p>
+              <a:t> </a:t>
+            </a:r>
             <a:r>
               <a:rPr lang="en-GB" b="0" i="0" dirty="0" err="1">
                 <a:effectLst/>
                 <a:latin typeface="Söhne"/>
               </a:rPr>
-              <a:t>Forstå</a:t>
+              <a:t>displayegenskaber</a:t>
             </a:r>
             <a:r>
               <a:rPr lang="en-GB" b="0" i="0" dirty="0">
                 <a:effectLst/>
                 <a:latin typeface="Söhne"/>
               </a:rPr>
+              <a:t>. </a:t>
+            </a:r>
+          </a:p>
+          <a:p>
+            <a:r>
+              <a:rPr lang="en-GB" b="0" i="0" dirty="0" err="1">
+                <a:effectLst/>
+                <a:latin typeface="Söhne"/>
+              </a:rPr>
+              <a:t>Lær</a:t>
+            </a:r>
+            <a:r>
+              <a:rPr lang="en-GB" b="0" i="0" dirty="0">
+                <a:effectLst/>
+                <a:latin typeface="Söhne"/>
+              </a:rPr>
+              <a:t> om </a:t>
+            </a:r>
+            <a:r>
+              <a:rPr lang="en-GB" b="0" i="0" dirty="0" err="1">
+                <a:effectLst/>
+                <a:latin typeface="Söhne"/>
+              </a:rPr>
+              <a:t>skrifttypetilpasning</a:t>
+            </a:r>
+            <a:r>
+              <a:rPr lang="en-GB" b="0" i="0" dirty="0">
+                <a:effectLst/>
+                <a:latin typeface="Söhne"/>
+              </a:rPr>
               <a:t> </a:t>
             </a:r>
             <a:r>
@@ -15033,7 +14640,7 @@
                 <a:effectLst/>
                 <a:latin typeface="Söhne"/>
               </a:rPr>
-              <a:t>flexretning</a:t>
+              <a:t>ved</a:t>
             </a:r>
             <a:r>
               <a:rPr lang="en-GB" b="0" i="0" dirty="0">
@@ -15047,6 +14654,34 @@
                 <a:effectLst/>
                 <a:latin typeface="Söhne"/>
               </a:rPr>
+              <a:t>hjælp</a:t>
+            </a:r>
+            <a:r>
+              <a:rPr lang="en-GB" b="0" i="0" dirty="0">
+                <a:effectLst/>
+                <a:latin typeface="Söhne"/>
+              </a:rPr>
+              <a:t> </a:t>
+            </a:r>
+            <a:r>
+              <a:rPr lang="en-GB" b="0" i="0" dirty="0" err="1">
+                <a:effectLst/>
+                <a:latin typeface="Söhne"/>
+              </a:rPr>
+              <a:t>af</a:t>
+            </a:r>
+            <a:r>
+              <a:rPr lang="en-GB" b="0" i="0" dirty="0">
+                <a:effectLst/>
+                <a:latin typeface="Söhne"/>
+              </a:rPr>
+              <a:t> CSS </a:t>
+            </a:r>
+            <a:r>
+              <a:rPr lang="en-GB" b="0" i="0" dirty="0" err="1">
+                <a:effectLst/>
+                <a:latin typeface="Söhne"/>
+              </a:rPr>
               <a:t>og</a:t>
             </a:r>
             <a:r>
@@ -15061,388 +14696,144 @@
                 <a:effectLst/>
                 <a:latin typeface="Söhne"/>
               </a:rPr>
-              <a:t>hvordan</a:t>
+              <a:t>websikre</a:t>
             </a:r>
             <a:r>
               <a:rPr lang="en-GB" b="0" i="0" dirty="0">
                 <a:effectLst/>
                 <a:latin typeface="Söhne"/>
               </a:rPr>
-              <a:t> det </a:t>
+              <a:t> </a:t>
             </a:r>
             <a:r>
               <a:rPr lang="en-GB" b="0" i="0" dirty="0" err="1">
                 <a:effectLst/>
                 <a:latin typeface="Söhne"/>
               </a:rPr>
-              <a:t>påvirker</a:t>
+              <a:t>skrifttyper</a:t>
             </a:r>
             <a:r>
               <a:rPr lang="en-GB" b="0" i="0" dirty="0">
                 <a:effectLst/>
                 <a:latin typeface="Söhne"/>
               </a:rPr>
-              <a:t> layout. </a:t>
-            </a:r>
-          </a:p>
-          <a:p>
+              <a:t>.</a:t>
+            </a:r>
+          </a:p>
+          <a:p>
+            <a:r>
+              <a:rPr lang="en-GB" b="0" i="0" dirty="0">
+                <a:effectLst/>
+                <a:latin typeface="Söhne"/>
+              </a:rPr>
+              <a:t> Implementer </a:t>
+            </a:r>
             <a:r>
               <a:rPr lang="en-GB" b="0" i="0" dirty="0" err="1">
                 <a:effectLst/>
                 <a:latin typeface="Söhne"/>
               </a:rPr>
-              <a:t>Forstå</a:t>
+              <a:t>responsivitet</a:t>
             </a:r>
             <a:r>
               <a:rPr lang="en-GB" b="0" i="0" dirty="0">
                 <a:effectLst/>
                 <a:latin typeface="Söhne"/>
               </a:rPr>
-              <a:t>  shorthand-</a:t>
+              <a:t> </a:t>
             </a:r>
             <a:r>
               <a:rPr lang="en-GB" b="0" i="0" dirty="0" err="1">
                 <a:effectLst/>
                 <a:latin typeface="Söhne"/>
               </a:rPr>
-              <a:t>egenskaben</a:t>
+              <a:t>ved</a:t>
             </a:r>
             <a:r>
               <a:rPr lang="en-GB" b="0" i="0" dirty="0">
                 <a:effectLst/>
                 <a:latin typeface="Söhne"/>
               </a:rPr>
-              <a:t>.</a:t>
-            </a:r>
-          </a:p>
-          <a:p>
+              <a:t> </a:t>
+            </a:r>
             <a:r>
               <a:rPr lang="en-GB" b="0" i="0" dirty="0" err="1">
                 <a:effectLst/>
                 <a:latin typeface="Söhne"/>
               </a:rPr>
-              <a:t>Lær</a:t>
+              <a:t>hjælp</a:t>
             </a:r>
             <a:r>
               <a:rPr lang="en-GB" b="0" i="0" dirty="0">
                 <a:effectLst/>
                 <a:latin typeface="Söhne"/>
               </a:rPr>
-              <a:t> om, </a:t>
+              <a:t> </a:t>
             </a:r>
             <a:r>
               <a:rPr lang="en-GB" b="0" i="0" dirty="0" err="1">
                 <a:effectLst/>
                 <a:latin typeface="Söhne"/>
               </a:rPr>
-              <a:t>hvordan</a:t>
+              <a:t>af</a:t>
             </a:r>
             <a:r>
               <a:rPr lang="en-GB" b="0" i="0" dirty="0">
                 <a:effectLst/>
                 <a:latin typeface="Söhne"/>
               </a:rPr>
-              <a:t> Grid </a:t>
+              <a:t> CSS-media query </a:t>
             </a:r>
             <a:r>
               <a:rPr lang="en-GB" b="0" i="0" dirty="0" err="1">
                 <a:effectLst/>
                 <a:latin typeface="Söhne"/>
               </a:rPr>
-              <a:t>adskiller</a:t>
+              <a:t>og</a:t>
             </a:r>
             <a:r>
               <a:rPr lang="en-GB" b="0" i="0" dirty="0">
                 <a:effectLst/>
                 <a:latin typeface="Söhne"/>
               </a:rPr>
-              <a:t> sig </a:t>
+              <a:t> breakpoints. </a:t>
+            </a:r>
+          </a:p>
+          <a:p>
+            <a:r>
+              <a:rPr lang="en-GB" b="0" i="0" dirty="0">
+                <a:effectLst/>
+                <a:latin typeface="Söhne"/>
+              </a:rPr>
+              <a:t>CSS float- </a:t>
             </a:r>
             <a:r>
               <a:rPr lang="en-GB" b="0" i="0" dirty="0" err="1">
                 <a:effectLst/>
                 <a:latin typeface="Söhne"/>
               </a:rPr>
-              <a:t>fra</a:t>
+              <a:t>og</a:t>
             </a:r>
             <a:r>
               <a:rPr lang="en-GB" b="0" i="0" dirty="0">
                 <a:effectLst/>
                 <a:latin typeface="Söhne"/>
               </a:rPr>
-              <a:t> flexbox</a:t>
-            </a:r>
-          </a:p>
-          <a:p>
+              <a:t> clear-</a:t>
+            </a:r>
+            <a:r>
+              <a:rPr lang="en-GB" b="0" i="0" dirty="0" err="1">
+                <a:effectLst/>
+                <a:latin typeface="Söhne"/>
+              </a:rPr>
+              <a:t>egenskaber</a:t>
+            </a:r>
             <a:r>
               <a:rPr lang="en-GB" b="0" i="0" dirty="0">
                 <a:effectLst/>
                 <a:latin typeface="Söhne"/>
               </a:rPr>
-              <a:t>. </a:t>
-            </a:r>
-            <a:r>
-              <a:rPr lang="en-GB" b="0" i="0" dirty="0" err="1">
-                <a:effectLst/>
-                <a:latin typeface="Söhne"/>
-              </a:rPr>
-              <a:t>Forstå</a:t>
-            </a:r>
-            <a:r>
-              <a:rPr lang="en-GB" b="0" i="0" dirty="0">
-                <a:effectLst/>
-                <a:latin typeface="Söhne"/>
-              </a:rPr>
-              <a:t> </a:t>
-            </a:r>
-            <a:r>
-              <a:rPr lang="en-GB" b="0" i="0" dirty="0" err="1">
-                <a:effectLst/>
-                <a:latin typeface="Söhne"/>
-              </a:rPr>
-              <a:t>hvad</a:t>
-            </a:r>
-            <a:r>
-              <a:rPr lang="en-GB" b="0" i="0" dirty="0">
-                <a:effectLst/>
-                <a:latin typeface="Söhne"/>
-              </a:rPr>
-              <a:t> der </a:t>
-            </a:r>
-            <a:r>
-              <a:rPr lang="en-GB" b="0" i="0" dirty="0" err="1">
-                <a:effectLst/>
-                <a:latin typeface="Söhne"/>
-              </a:rPr>
-              <a:t>sker</a:t>
-            </a:r>
-            <a:r>
-              <a:rPr lang="en-GB" b="0" i="0" dirty="0">
-                <a:effectLst/>
-                <a:latin typeface="Söhne"/>
-              </a:rPr>
-              <a:t>, </a:t>
-            </a:r>
-            <a:r>
-              <a:rPr lang="en-GB" b="0" i="0" dirty="0" err="1">
-                <a:effectLst/>
-                <a:latin typeface="Söhne"/>
-              </a:rPr>
-              <a:t>når</a:t>
-            </a:r>
-            <a:r>
-              <a:rPr lang="en-GB" b="0" i="0" dirty="0">
-                <a:effectLst/>
-                <a:latin typeface="Söhne"/>
-              </a:rPr>
-              <a:t> display er sat</a:t>
-            </a:r>
-          </a:p>
-          <a:p>
-            <a:r>
-              <a:rPr lang="en-GB" b="0" i="0" dirty="0">
-                <a:effectLst/>
-                <a:latin typeface="Söhne"/>
-              </a:rPr>
-              <a:t>. </a:t>
-            </a:r>
-            <a:r>
-              <a:rPr lang="en-GB" b="0" i="0" dirty="0" err="1">
-                <a:effectLst/>
-                <a:latin typeface="Söhne"/>
-              </a:rPr>
-              <a:t>Lær</a:t>
-            </a:r>
-            <a:r>
-              <a:rPr lang="en-GB" b="0" i="0" dirty="0">
-                <a:effectLst/>
-                <a:latin typeface="Söhne"/>
-              </a:rPr>
-              <a:t> </a:t>
-            </a:r>
-            <a:r>
-              <a:rPr lang="en-GB" b="0" i="0" dirty="0" err="1">
-                <a:effectLst/>
-                <a:latin typeface="Söhne"/>
-              </a:rPr>
-              <a:t>hvordan</a:t>
-            </a:r>
-            <a:r>
-              <a:rPr lang="en-GB" b="0" i="0" dirty="0">
-                <a:effectLst/>
-                <a:latin typeface="Söhne"/>
-              </a:rPr>
-              <a:t> grid-</a:t>
-            </a:r>
-            <a:r>
-              <a:rPr lang="en-GB" b="0" i="0" dirty="0" err="1">
-                <a:effectLst/>
-                <a:latin typeface="Söhne"/>
-              </a:rPr>
-              <a:t>størrelse</a:t>
-            </a:r>
-            <a:r>
-              <a:rPr lang="en-GB" b="0" i="0" dirty="0">
-                <a:effectLst/>
-                <a:latin typeface="Söhne"/>
-              </a:rPr>
-              <a:t> </a:t>
-            </a:r>
-            <a:r>
-              <a:rPr lang="en-GB" b="0" i="0" dirty="0" err="1">
-                <a:effectLst/>
-                <a:latin typeface="Söhne"/>
-              </a:rPr>
-              <a:t>håndteres</a:t>
-            </a:r>
-            <a:r>
-              <a:rPr lang="en-GB" b="0" i="0" dirty="0">
-                <a:effectLst/>
-                <a:latin typeface="Söhne"/>
-              </a:rPr>
-              <a:t>, </a:t>
-            </a:r>
-            <a:r>
-              <a:rPr lang="en-GB" b="0" i="0" dirty="0" err="1">
-                <a:effectLst/>
-                <a:latin typeface="Söhne"/>
-              </a:rPr>
-              <a:t>og</a:t>
-            </a:r>
-            <a:r>
-              <a:rPr lang="en-GB" b="0" i="0" dirty="0">
-                <a:effectLst/>
-                <a:latin typeface="Söhne"/>
-              </a:rPr>
-              <a:t> </a:t>
-            </a:r>
-            <a:r>
-              <a:rPr lang="en-GB" b="0" i="0" dirty="0" err="1">
-                <a:effectLst/>
-                <a:latin typeface="Söhne"/>
-              </a:rPr>
-              <a:t>hvordan</a:t>
-            </a:r>
-            <a:r>
-              <a:rPr lang="en-GB" b="0" i="0" dirty="0">
-                <a:effectLst/>
-                <a:latin typeface="Söhne"/>
-              </a:rPr>
-              <a:t> man </a:t>
-            </a:r>
-            <a:r>
-              <a:rPr lang="en-GB" b="0" i="0" dirty="0" err="1">
-                <a:effectLst/>
-                <a:latin typeface="Söhne"/>
-              </a:rPr>
-              <a:t>opretter</a:t>
-            </a:r>
-            <a:r>
-              <a:rPr lang="en-GB" b="0" i="0" dirty="0">
-                <a:effectLst/>
-                <a:latin typeface="Söhne"/>
-              </a:rPr>
-              <a:t> et grid. </a:t>
-            </a:r>
-          </a:p>
-          <a:p>
-            <a:r>
-              <a:rPr lang="en-GB" b="0" i="0" dirty="0" err="1">
-                <a:effectLst/>
-                <a:latin typeface="Söhne"/>
-              </a:rPr>
-              <a:t>Lær</a:t>
-            </a:r>
-            <a:r>
-              <a:rPr lang="en-GB" b="0" i="0" dirty="0">
-                <a:effectLst/>
-                <a:latin typeface="Söhne"/>
-              </a:rPr>
-              <a:t> at </a:t>
-            </a:r>
-            <a:r>
-              <a:rPr lang="en-GB" b="0" i="0" dirty="0" err="1">
-                <a:effectLst/>
-                <a:latin typeface="Söhne"/>
-              </a:rPr>
-              <a:t>positionere</a:t>
-            </a:r>
-            <a:r>
-              <a:rPr lang="en-GB" b="0" i="0" dirty="0">
-                <a:effectLst/>
-                <a:latin typeface="Söhne"/>
-              </a:rPr>
-              <a:t> </a:t>
-            </a:r>
-            <a:r>
-              <a:rPr lang="en-GB" b="0" i="0" dirty="0" err="1">
-                <a:effectLst/>
-                <a:latin typeface="Söhne"/>
-              </a:rPr>
-              <a:t>elementer</a:t>
-            </a:r>
-            <a:r>
-              <a:rPr lang="en-GB" b="0" i="0" dirty="0">
-                <a:effectLst/>
-                <a:latin typeface="Söhne"/>
-              </a:rPr>
-              <a:t> </a:t>
-            </a:r>
-            <a:r>
-              <a:rPr lang="en-GB" b="0" i="0" dirty="0" err="1">
-                <a:effectLst/>
-                <a:latin typeface="Söhne"/>
-              </a:rPr>
-              <a:t>i</a:t>
-            </a:r>
-            <a:r>
-              <a:rPr lang="en-GB" b="0" i="0" dirty="0">
-                <a:effectLst/>
-                <a:latin typeface="Söhne"/>
-              </a:rPr>
-              <a:t> et grid </a:t>
-            </a:r>
-            <a:r>
-              <a:rPr lang="en-GB" b="0" i="0" dirty="0" err="1">
-                <a:effectLst/>
-                <a:latin typeface="Söhne"/>
-              </a:rPr>
-              <a:t>ved</a:t>
-            </a:r>
-            <a:r>
-              <a:rPr lang="en-GB" b="0" i="0" dirty="0">
-                <a:effectLst/>
-                <a:latin typeface="Söhne"/>
-              </a:rPr>
-              <a:t> </a:t>
-            </a:r>
-            <a:r>
-              <a:rPr lang="en-GB" b="0" i="0" dirty="0" err="1">
-                <a:effectLst/>
-                <a:latin typeface="Söhne"/>
-              </a:rPr>
-              <a:t>hjælp</a:t>
-            </a:r>
-            <a:r>
-              <a:rPr lang="en-GB" b="0" i="0" dirty="0">
-                <a:effectLst/>
-                <a:latin typeface="Söhne"/>
-              </a:rPr>
-              <a:t> </a:t>
-            </a:r>
-            <a:r>
-              <a:rPr lang="en-GB" b="0" i="0" dirty="0" err="1">
-                <a:effectLst/>
-                <a:latin typeface="Söhne"/>
-              </a:rPr>
-              <a:t>af</a:t>
-            </a:r>
-            <a:r>
-              <a:rPr lang="en-GB" b="0" i="0" dirty="0">
-                <a:effectLst/>
-                <a:latin typeface="Söhne"/>
-              </a:rPr>
-              <a:t> native CSS.</a:t>
+              <a:t>.  </a:t>
             </a:r>
             <a:endParaRPr lang="en-DK" dirty="0"/>
           </a:p>
@@ -15453,7 +14844,7 @@
           <p:cNvPr id="4" name="Date Placeholder 3">
             <a:extLst>
               <a:ext uri="{FF2B5EF4-FFF2-40B4-BE49-F238E27FC236}">
-                <a16:creationId xmlns:a16="http://schemas.microsoft.com/office/drawing/2014/main" id="{19B8101C-76F2-A5CB-F18C-7D896FEE1AF5}"/>
+                <a16:creationId xmlns:a16="http://schemas.microsoft.com/office/drawing/2014/main" id="{E001150C-CCE6-5B6E-2A44-A12CBB5A308F}"/>
               </a:ext>
             </a:extLst>
           </p:cNvPr>
@@ -15482,7 +14873,7 @@
           <p:cNvPr id="5" name="Footer Placeholder 4">
             <a:extLst>
               <a:ext uri="{FF2B5EF4-FFF2-40B4-BE49-F238E27FC236}">
-                <a16:creationId xmlns:a16="http://schemas.microsoft.com/office/drawing/2014/main" id="{FD38E187-5D96-354D-52BD-5AE9A6B809DF}"/>
+                <a16:creationId xmlns:a16="http://schemas.microsoft.com/office/drawing/2014/main" id="{5463F7D9-DDE6-12F7-3688-2AAB28B044FC}"/>
               </a:ext>
             </a:extLst>
           </p:cNvPr>
@@ -15510,7 +14901,7 @@
           <p:cNvPr id="6" name="Slide Number Placeholder 5">
             <a:extLst>
               <a:ext uri="{FF2B5EF4-FFF2-40B4-BE49-F238E27FC236}">
-                <a16:creationId xmlns:a16="http://schemas.microsoft.com/office/drawing/2014/main" id="{08B1BD36-AADE-475C-DB29-DB10215FCEDA}"/>
+                <a16:creationId xmlns:a16="http://schemas.microsoft.com/office/drawing/2014/main" id="{7BEA5A0A-2368-DDBC-29CA-81B0313605C2}"/>
               </a:ext>
             </a:extLst>
           </p:cNvPr>
@@ -15537,7 +14928,7 @@
     </p:spTree>
     <p:extLst>
       <p:ext uri="{BB962C8B-B14F-4D97-AF65-F5344CB8AC3E}">
-        <p14:creationId xmlns:p14="http://schemas.microsoft.com/office/powerpoint/2010/main" val="1964480937"/>
+        <p14:creationId xmlns:p14="http://schemas.microsoft.com/office/powerpoint/2010/main" val="918707087"/>
       </p:ext>
     </p:extLst>
   </p:cSld>
@@ -15569,6 +14960,744 @@
           <p:cNvPr id="2" name="Title 1">
             <a:extLst>
               <a:ext uri="{FF2B5EF4-FFF2-40B4-BE49-F238E27FC236}">
+                <a16:creationId xmlns:a16="http://schemas.microsoft.com/office/drawing/2014/main" id="{CFBBE1CC-2EF4-6790-DB92-B42645235799}"/>
+              </a:ext>
+            </a:extLst>
+          </p:cNvPr>
+          <p:cNvSpPr>
+            <a:spLocks noGrp="1"/>
+          </p:cNvSpPr>
+          <p:nvPr>
+            <p:ph type="title"/>
+          </p:nvPr>
+        </p:nvSpPr>
+        <p:spPr/>
+        <p:txBody>
+          <a:bodyPr/>
+          <a:lstStyle/>
+          <a:p>
+            <a:r>
+              <a:rPr lang="en-DK" dirty="0"/>
+              <a:t>CSS  RWD viden Flex &amp; Grid</a:t>
+            </a:r>
+          </a:p>
+        </p:txBody>
+      </p:sp>
+      <p:sp>
+        <p:nvSpPr>
+          <p:cNvPr id="3" name="Content Placeholder 2">
+            <a:extLst>
+              <a:ext uri="{FF2B5EF4-FFF2-40B4-BE49-F238E27FC236}">
+                <a16:creationId xmlns:a16="http://schemas.microsoft.com/office/drawing/2014/main" id="{7EB654C5-0285-C1AC-30CB-89910134FC3E}"/>
+              </a:ext>
+            </a:extLst>
+          </p:cNvPr>
+          <p:cNvSpPr>
+            <a:spLocks noGrp="1"/>
+          </p:cNvSpPr>
+          <p:nvPr>
+            <p:ph idx="1"/>
+          </p:nvPr>
+        </p:nvSpPr>
+        <p:spPr/>
+        <p:txBody>
+          <a:bodyPr>
+            <a:normAutofit/>
+          </a:bodyPr>
+          <a:lstStyle/>
+          <a:p>
+            <a:r>
+              <a:rPr lang="en-GB" b="0" i="0" dirty="0" err="1">
+                <a:effectLst/>
+                <a:latin typeface="Söhne"/>
+              </a:rPr>
+              <a:t>hvorfor</a:t>
+            </a:r>
+            <a:r>
+              <a:rPr lang="en-GB" b="0" i="0" dirty="0">
+                <a:effectLst/>
+                <a:latin typeface="Söhne"/>
+              </a:rPr>
+              <a:t> flexbox </a:t>
+            </a:r>
+            <a:r>
+              <a:rPr lang="en-GB" b="0" i="0" dirty="0" err="1">
+                <a:effectLst/>
+                <a:latin typeface="Söhne"/>
+              </a:rPr>
+              <a:t>blev</a:t>
+            </a:r>
+            <a:r>
+              <a:rPr lang="en-GB" b="0" i="0" dirty="0">
+                <a:effectLst/>
+                <a:latin typeface="Söhne"/>
+              </a:rPr>
+              <a:t> </a:t>
+            </a:r>
+            <a:r>
+              <a:rPr lang="en-GB" b="0" i="0" dirty="0" err="1">
+                <a:effectLst/>
+                <a:latin typeface="Söhne"/>
+              </a:rPr>
+              <a:t>introduceret</a:t>
+            </a:r>
+            <a:r>
+              <a:rPr lang="en-GB" b="0" i="0" dirty="0">
+                <a:effectLst/>
+                <a:latin typeface="Söhne"/>
+              </a:rPr>
+              <a:t> </a:t>
+            </a:r>
+            <a:r>
+              <a:rPr lang="en-GB" b="0" i="0" dirty="0" err="1">
+                <a:effectLst/>
+                <a:latin typeface="Söhne"/>
+              </a:rPr>
+              <a:t>til</a:t>
+            </a:r>
+            <a:r>
+              <a:rPr lang="en-GB" b="0" i="0" dirty="0">
+                <a:effectLst/>
+                <a:latin typeface="Söhne"/>
+              </a:rPr>
+              <a:t> CSS.</a:t>
+            </a:r>
+          </a:p>
+          <a:p>
+            <a:r>
+              <a:rPr lang="en-GB" b="0" i="0" dirty="0">
+                <a:effectLst/>
+                <a:latin typeface="Söhne"/>
+              </a:rPr>
+              <a:t> </a:t>
+            </a:r>
+            <a:r>
+              <a:rPr lang="en-GB" b="0" i="0" dirty="0" err="1">
+                <a:effectLst/>
+                <a:latin typeface="Söhne"/>
+              </a:rPr>
+              <a:t>Forstå</a:t>
+            </a:r>
+            <a:r>
+              <a:rPr lang="en-GB" b="0" i="0" dirty="0">
+                <a:effectLst/>
+                <a:latin typeface="Söhne"/>
+              </a:rPr>
+              <a:t> </a:t>
+            </a:r>
+            <a:r>
+              <a:rPr lang="en-GB" b="0" i="0" dirty="0" err="1">
+                <a:effectLst/>
+                <a:latin typeface="Söhne"/>
+              </a:rPr>
+              <a:t>hvad</a:t>
+            </a:r>
+            <a:r>
+              <a:rPr lang="en-GB" b="0" i="0" dirty="0">
+                <a:effectLst/>
+                <a:latin typeface="Söhne"/>
+              </a:rPr>
+              <a:t> der </a:t>
+            </a:r>
+            <a:r>
+              <a:rPr lang="en-GB" b="0" i="0" dirty="0" err="1">
+                <a:effectLst/>
+                <a:latin typeface="Söhne"/>
+              </a:rPr>
+              <a:t>sker</a:t>
+            </a:r>
+            <a:r>
+              <a:rPr lang="en-GB" b="0" i="0" dirty="0">
+                <a:effectLst/>
+                <a:latin typeface="Söhne"/>
+              </a:rPr>
+              <a:t>, </a:t>
+            </a:r>
+            <a:r>
+              <a:rPr lang="en-GB" b="0" i="0" dirty="0" err="1">
+                <a:effectLst/>
+                <a:latin typeface="Söhne"/>
+              </a:rPr>
+              <a:t>når</a:t>
+            </a:r>
+            <a:r>
+              <a:rPr lang="en-GB" b="0" i="0" dirty="0">
+                <a:effectLst/>
+                <a:latin typeface="Söhne"/>
+              </a:rPr>
+              <a:t> display er sat </a:t>
+            </a:r>
+            <a:r>
+              <a:rPr lang="en-GB" b="0" i="0" dirty="0" err="1">
+                <a:effectLst/>
+                <a:latin typeface="Söhne"/>
+              </a:rPr>
+              <a:t>som</a:t>
+            </a:r>
+            <a:r>
+              <a:rPr lang="en-GB" b="0" i="0" dirty="0">
+                <a:effectLst/>
+                <a:latin typeface="Söhne"/>
+              </a:rPr>
+              <a:t> flex. </a:t>
+            </a:r>
+          </a:p>
+          <a:p>
+            <a:r>
+              <a:rPr lang="en-GB" b="0" i="0" dirty="0" err="1">
+                <a:effectLst/>
+                <a:latin typeface="Söhne"/>
+              </a:rPr>
+              <a:t>Forstå</a:t>
+            </a:r>
+            <a:r>
+              <a:rPr lang="en-GB" b="0" i="0" dirty="0">
+                <a:effectLst/>
+                <a:latin typeface="Söhne"/>
+              </a:rPr>
+              <a:t> </a:t>
+            </a:r>
+            <a:r>
+              <a:rPr lang="en-GB" b="0" i="0" dirty="0" err="1">
+                <a:effectLst/>
+                <a:latin typeface="Söhne"/>
+              </a:rPr>
+              <a:t>flexretning</a:t>
+            </a:r>
+            <a:r>
+              <a:rPr lang="en-GB" b="0" i="0" dirty="0">
+                <a:effectLst/>
+                <a:latin typeface="Söhne"/>
+              </a:rPr>
+              <a:t> </a:t>
+            </a:r>
+            <a:r>
+              <a:rPr lang="en-GB" b="0" i="0" dirty="0" err="1">
+                <a:effectLst/>
+                <a:latin typeface="Söhne"/>
+              </a:rPr>
+              <a:t>og</a:t>
+            </a:r>
+            <a:r>
+              <a:rPr lang="en-GB" b="0" i="0" dirty="0">
+                <a:effectLst/>
+                <a:latin typeface="Söhne"/>
+              </a:rPr>
+              <a:t> </a:t>
+            </a:r>
+            <a:r>
+              <a:rPr lang="en-GB" b="0" i="0" dirty="0" err="1">
+                <a:effectLst/>
+                <a:latin typeface="Söhne"/>
+              </a:rPr>
+              <a:t>hvordan</a:t>
+            </a:r>
+            <a:r>
+              <a:rPr lang="en-GB" b="0" i="0" dirty="0">
+                <a:effectLst/>
+                <a:latin typeface="Söhne"/>
+              </a:rPr>
+              <a:t> det </a:t>
+            </a:r>
+            <a:r>
+              <a:rPr lang="en-GB" b="0" i="0" dirty="0" err="1">
+                <a:effectLst/>
+                <a:latin typeface="Söhne"/>
+              </a:rPr>
+              <a:t>påvirker</a:t>
+            </a:r>
+            <a:r>
+              <a:rPr lang="en-GB" b="0" i="0" dirty="0">
+                <a:effectLst/>
+                <a:latin typeface="Söhne"/>
+              </a:rPr>
+              <a:t> layout. </a:t>
+            </a:r>
+          </a:p>
+          <a:p>
+            <a:r>
+              <a:rPr lang="en-GB" b="0" i="0" dirty="0" err="1">
+                <a:effectLst/>
+                <a:latin typeface="Söhne"/>
+              </a:rPr>
+              <a:t>Forstå</a:t>
+            </a:r>
+            <a:r>
+              <a:rPr lang="en-GB" b="0" i="0" dirty="0">
+                <a:effectLst/>
+                <a:latin typeface="Söhne"/>
+              </a:rPr>
+              <a:t>  shorthand-</a:t>
+            </a:r>
+            <a:r>
+              <a:rPr lang="en-GB" b="0" i="0" dirty="0" err="1">
+                <a:effectLst/>
+                <a:latin typeface="Söhne"/>
+              </a:rPr>
+              <a:t>egenskaben</a:t>
+            </a:r>
+            <a:r>
+              <a:rPr lang="en-GB" b="0" i="0" dirty="0">
+                <a:effectLst/>
+                <a:latin typeface="Söhne"/>
+              </a:rPr>
+              <a:t>.</a:t>
+            </a:r>
+          </a:p>
+          <a:p>
+            <a:r>
+              <a:rPr lang="en-GB" b="0" i="0" dirty="0" err="1">
+                <a:effectLst/>
+                <a:latin typeface="Söhne"/>
+              </a:rPr>
+              <a:t>Lær</a:t>
+            </a:r>
+            <a:r>
+              <a:rPr lang="en-GB" b="0" i="0" dirty="0">
+                <a:effectLst/>
+                <a:latin typeface="Söhne"/>
+              </a:rPr>
+              <a:t> om, </a:t>
+            </a:r>
+            <a:r>
+              <a:rPr lang="en-GB" b="0" i="0" dirty="0" err="1">
+                <a:effectLst/>
+                <a:latin typeface="Söhne"/>
+              </a:rPr>
+              <a:t>hvordan</a:t>
+            </a:r>
+            <a:r>
+              <a:rPr lang="en-GB" b="0" i="0" dirty="0">
+                <a:effectLst/>
+                <a:latin typeface="Söhne"/>
+              </a:rPr>
+              <a:t> Grid </a:t>
+            </a:r>
+            <a:r>
+              <a:rPr lang="en-GB" b="0" i="0" dirty="0" err="1">
+                <a:effectLst/>
+                <a:latin typeface="Söhne"/>
+              </a:rPr>
+              <a:t>adskiller</a:t>
+            </a:r>
+            <a:r>
+              <a:rPr lang="en-GB" b="0" i="0" dirty="0">
+                <a:effectLst/>
+                <a:latin typeface="Söhne"/>
+              </a:rPr>
+              <a:t> sig </a:t>
+            </a:r>
+            <a:r>
+              <a:rPr lang="en-GB" b="0" i="0" dirty="0" err="1">
+                <a:effectLst/>
+                <a:latin typeface="Söhne"/>
+              </a:rPr>
+              <a:t>fra</a:t>
+            </a:r>
+            <a:r>
+              <a:rPr lang="en-GB" b="0" i="0" dirty="0">
+                <a:effectLst/>
+                <a:latin typeface="Söhne"/>
+              </a:rPr>
+              <a:t> flexbox</a:t>
+            </a:r>
+          </a:p>
+          <a:p>
+            <a:r>
+              <a:rPr lang="en-GB" b="0" i="0" dirty="0">
+                <a:effectLst/>
+                <a:latin typeface="Söhne"/>
+              </a:rPr>
+              <a:t>. </a:t>
+            </a:r>
+            <a:r>
+              <a:rPr lang="en-GB" b="0" i="0" dirty="0" err="1">
+                <a:effectLst/>
+                <a:latin typeface="Söhne"/>
+              </a:rPr>
+              <a:t>Forstå</a:t>
+            </a:r>
+            <a:r>
+              <a:rPr lang="en-GB" b="0" i="0" dirty="0">
+                <a:effectLst/>
+                <a:latin typeface="Söhne"/>
+              </a:rPr>
+              <a:t> </a:t>
+            </a:r>
+            <a:r>
+              <a:rPr lang="en-GB" b="0" i="0" dirty="0" err="1">
+                <a:effectLst/>
+                <a:latin typeface="Söhne"/>
+              </a:rPr>
+              <a:t>hvad</a:t>
+            </a:r>
+            <a:r>
+              <a:rPr lang="en-GB" b="0" i="0" dirty="0">
+                <a:effectLst/>
+                <a:latin typeface="Söhne"/>
+              </a:rPr>
+              <a:t> der </a:t>
+            </a:r>
+            <a:r>
+              <a:rPr lang="en-GB" b="0" i="0" dirty="0" err="1">
+                <a:effectLst/>
+                <a:latin typeface="Söhne"/>
+              </a:rPr>
+              <a:t>sker</a:t>
+            </a:r>
+            <a:r>
+              <a:rPr lang="en-GB" b="0" i="0" dirty="0">
+                <a:effectLst/>
+                <a:latin typeface="Söhne"/>
+              </a:rPr>
+              <a:t>, </a:t>
+            </a:r>
+            <a:r>
+              <a:rPr lang="en-GB" b="0" i="0" dirty="0" err="1">
+                <a:effectLst/>
+                <a:latin typeface="Söhne"/>
+              </a:rPr>
+              <a:t>når</a:t>
+            </a:r>
+            <a:r>
+              <a:rPr lang="en-GB" b="0" i="0" dirty="0">
+                <a:effectLst/>
+                <a:latin typeface="Söhne"/>
+              </a:rPr>
+              <a:t> display er sat</a:t>
+            </a:r>
+          </a:p>
+          <a:p>
+            <a:r>
+              <a:rPr lang="en-GB" b="0" i="0" dirty="0">
+                <a:effectLst/>
+                <a:latin typeface="Söhne"/>
+              </a:rPr>
+              <a:t>. </a:t>
+            </a:r>
+            <a:r>
+              <a:rPr lang="en-GB" b="0" i="0" dirty="0" err="1">
+                <a:effectLst/>
+                <a:latin typeface="Söhne"/>
+              </a:rPr>
+              <a:t>Lær</a:t>
+            </a:r>
+            <a:r>
+              <a:rPr lang="en-GB" b="0" i="0" dirty="0">
+                <a:effectLst/>
+                <a:latin typeface="Söhne"/>
+              </a:rPr>
+              <a:t> </a:t>
+            </a:r>
+            <a:r>
+              <a:rPr lang="en-GB" b="0" i="0" dirty="0" err="1">
+                <a:effectLst/>
+                <a:latin typeface="Söhne"/>
+              </a:rPr>
+              <a:t>hvordan</a:t>
+            </a:r>
+            <a:r>
+              <a:rPr lang="en-GB" b="0" i="0" dirty="0">
+                <a:effectLst/>
+                <a:latin typeface="Söhne"/>
+              </a:rPr>
+              <a:t> grid-</a:t>
+            </a:r>
+            <a:r>
+              <a:rPr lang="en-GB" b="0" i="0" dirty="0" err="1">
+                <a:effectLst/>
+                <a:latin typeface="Söhne"/>
+              </a:rPr>
+              <a:t>størrelse</a:t>
+            </a:r>
+            <a:r>
+              <a:rPr lang="en-GB" b="0" i="0" dirty="0">
+                <a:effectLst/>
+                <a:latin typeface="Söhne"/>
+              </a:rPr>
+              <a:t> </a:t>
+            </a:r>
+            <a:r>
+              <a:rPr lang="en-GB" b="0" i="0" dirty="0" err="1">
+                <a:effectLst/>
+                <a:latin typeface="Söhne"/>
+              </a:rPr>
+              <a:t>håndteres</a:t>
+            </a:r>
+            <a:r>
+              <a:rPr lang="en-GB" b="0" i="0" dirty="0">
+                <a:effectLst/>
+                <a:latin typeface="Söhne"/>
+              </a:rPr>
+              <a:t>, </a:t>
+            </a:r>
+            <a:r>
+              <a:rPr lang="en-GB" b="0" i="0" dirty="0" err="1">
+                <a:effectLst/>
+                <a:latin typeface="Söhne"/>
+              </a:rPr>
+              <a:t>og</a:t>
+            </a:r>
+            <a:r>
+              <a:rPr lang="en-GB" b="0" i="0" dirty="0">
+                <a:effectLst/>
+                <a:latin typeface="Söhne"/>
+              </a:rPr>
+              <a:t> </a:t>
+            </a:r>
+            <a:r>
+              <a:rPr lang="en-GB" b="0" i="0" dirty="0" err="1">
+                <a:effectLst/>
+                <a:latin typeface="Söhne"/>
+              </a:rPr>
+              <a:t>hvordan</a:t>
+            </a:r>
+            <a:r>
+              <a:rPr lang="en-GB" b="0" i="0" dirty="0">
+                <a:effectLst/>
+                <a:latin typeface="Söhne"/>
+              </a:rPr>
+              <a:t> man </a:t>
+            </a:r>
+            <a:r>
+              <a:rPr lang="en-GB" b="0" i="0" dirty="0" err="1">
+                <a:effectLst/>
+                <a:latin typeface="Söhne"/>
+              </a:rPr>
+              <a:t>opretter</a:t>
+            </a:r>
+            <a:r>
+              <a:rPr lang="en-GB" b="0" i="0" dirty="0">
+                <a:effectLst/>
+                <a:latin typeface="Söhne"/>
+              </a:rPr>
+              <a:t> et grid. </a:t>
+            </a:r>
+          </a:p>
+          <a:p>
+            <a:r>
+              <a:rPr lang="en-GB" b="0" i="0" dirty="0" err="1">
+                <a:effectLst/>
+                <a:latin typeface="Söhne"/>
+              </a:rPr>
+              <a:t>Lær</a:t>
+            </a:r>
+            <a:r>
+              <a:rPr lang="en-GB" b="0" i="0" dirty="0">
+                <a:effectLst/>
+                <a:latin typeface="Söhne"/>
+              </a:rPr>
+              <a:t> at </a:t>
+            </a:r>
+            <a:r>
+              <a:rPr lang="en-GB" b="0" i="0" dirty="0" err="1">
+                <a:effectLst/>
+                <a:latin typeface="Söhne"/>
+              </a:rPr>
+              <a:t>positionere</a:t>
+            </a:r>
+            <a:r>
+              <a:rPr lang="en-GB" b="0" i="0" dirty="0">
+                <a:effectLst/>
+                <a:latin typeface="Söhne"/>
+              </a:rPr>
+              <a:t> </a:t>
+            </a:r>
+            <a:r>
+              <a:rPr lang="en-GB" b="0" i="0" dirty="0" err="1">
+                <a:effectLst/>
+                <a:latin typeface="Söhne"/>
+              </a:rPr>
+              <a:t>elementer</a:t>
+            </a:r>
+            <a:r>
+              <a:rPr lang="en-GB" b="0" i="0" dirty="0">
+                <a:effectLst/>
+                <a:latin typeface="Söhne"/>
+              </a:rPr>
+              <a:t> </a:t>
+            </a:r>
+            <a:r>
+              <a:rPr lang="en-GB" b="0" i="0" dirty="0" err="1">
+                <a:effectLst/>
+                <a:latin typeface="Söhne"/>
+              </a:rPr>
+              <a:t>i</a:t>
+            </a:r>
+            <a:r>
+              <a:rPr lang="en-GB" b="0" i="0" dirty="0">
+                <a:effectLst/>
+                <a:latin typeface="Söhne"/>
+              </a:rPr>
+              <a:t> et grid </a:t>
+            </a:r>
+            <a:r>
+              <a:rPr lang="en-GB" b="0" i="0" dirty="0" err="1">
+                <a:effectLst/>
+                <a:latin typeface="Söhne"/>
+              </a:rPr>
+              <a:t>ved</a:t>
+            </a:r>
+            <a:r>
+              <a:rPr lang="en-GB" b="0" i="0" dirty="0">
+                <a:effectLst/>
+                <a:latin typeface="Söhne"/>
+              </a:rPr>
+              <a:t> </a:t>
+            </a:r>
+            <a:r>
+              <a:rPr lang="en-GB" b="0" i="0" dirty="0" err="1">
+                <a:effectLst/>
+                <a:latin typeface="Söhne"/>
+              </a:rPr>
+              <a:t>hjælp</a:t>
+            </a:r>
+            <a:r>
+              <a:rPr lang="en-GB" b="0" i="0" dirty="0">
+                <a:effectLst/>
+                <a:latin typeface="Söhne"/>
+              </a:rPr>
+              <a:t> </a:t>
+            </a:r>
+            <a:r>
+              <a:rPr lang="en-GB" b="0" i="0" dirty="0" err="1">
+                <a:effectLst/>
+                <a:latin typeface="Söhne"/>
+              </a:rPr>
+              <a:t>af</a:t>
+            </a:r>
+            <a:r>
+              <a:rPr lang="en-GB" b="0" i="0" dirty="0">
+                <a:effectLst/>
+                <a:latin typeface="Söhne"/>
+              </a:rPr>
+              <a:t> native CSS.</a:t>
+            </a:r>
+            <a:endParaRPr lang="en-DK" dirty="0"/>
+          </a:p>
+        </p:txBody>
+      </p:sp>
+      <p:sp>
+        <p:nvSpPr>
+          <p:cNvPr id="4" name="Date Placeholder 3">
+            <a:extLst>
+              <a:ext uri="{FF2B5EF4-FFF2-40B4-BE49-F238E27FC236}">
+                <a16:creationId xmlns:a16="http://schemas.microsoft.com/office/drawing/2014/main" id="{19B8101C-76F2-A5CB-F18C-7D896FEE1AF5}"/>
+              </a:ext>
+            </a:extLst>
+          </p:cNvPr>
+          <p:cNvSpPr>
+            <a:spLocks noGrp="1"/>
+          </p:cNvSpPr>
+          <p:nvPr>
+            <p:ph type="dt" sz="half" idx="10"/>
+          </p:nvPr>
+        </p:nvSpPr>
+        <p:spPr/>
+        <p:txBody>
+          <a:bodyPr/>
+          <a:lstStyle/>
+          <a:p>
+            <a:fld id="{0F996519-E62D-4F8C-AE1E-36928EC7D15C}" type="datetime1">
+              <a:rPr lang="en-US" smtClean="0"/>
+              <a:t>10/12/26</a:t>
+            </a:fld>
+            <a:endParaRPr lang="en-US"/>
+          </a:p>
+        </p:txBody>
+      </p:sp>
+      <p:sp>
+        <p:nvSpPr>
+          <p:cNvPr id="5" name="Footer Placeholder 4">
+            <a:extLst>
+              <a:ext uri="{FF2B5EF4-FFF2-40B4-BE49-F238E27FC236}">
+                <a16:creationId xmlns:a16="http://schemas.microsoft.com/office/drawing/2014/main" id="{FD38E187-5D96-354D-52BD-5AE9A6B809DF}"/>
+              </a:ext>
+            </a:extLst>
+          </p:cNvPr>
+          <p:cNvSpPr>
+            <a:spLocks noGrp="1"/>
+          </p:cNvSpPr>
+          <p:nvPr>
+            <p:ph type="ftr" sz="quarter" idx="11"/>
+          </p:nvPr>
+        </p:nvSpPr>
+        <p:spPr/>
+        <p:txBody>
+          <a:bodyPr/>
+          <a:lstStyle/>
+          <a:p>
+            <a:r>
+              <a:rPr lang="en-US"/>
+              <a:t>Sample Footer Text</a:t>
+            </a:r>
+          </a:p>
+        </p:txBody>
+      </p:sp>
+      <p:sp>
+        <p:nvSpPr>
+          <p:cNvPr id="6" name="Slide Number Placeholder 5">
+            <a:extLst>
+              <a:ext uri="{FF2B5EF4-FFF2-40B4-BE49-F238E27FC236}">
+                <a16:creationId xmlns:a16="http://schemas.microsoft.com/office/drawing/2014/main" id="{08B1BD36-AADE-475C-DB29-DB10215FCEDA}"/>
+              </a:ext>
+            </a:extLst>
+          </p:cNvPr>
+          <p:cNvSpPr>
+            <a:spLocks noGrp="1"/>
+          </p:cNvSpPr>
+          <p:nvPr>
+            <p:ph type="sldNum" sz="quarter" idx="12"/>
+          </p:nvPr>
+        </p:nvSpPr>
+        <p:spPr/>
+        <p:txBody>
+          <a:bodyPr/>
+          <a:lstStyle/>
+          <a:p>
+            <a:fld id="{6E91CC32-6A6B-4E2E-BBA1-6864F305DA26}" type="slidenum">
+              <a:rPr lang="en-US" smtClean="0"/>
+              <a:t>25</a:t>
+            </a:fld>
+            <a:endParaRPr lang="en-US"/>
+          </a:p>
+        </p:txBody>
+      </p:sp>
+    </p:spTree>
+    <p:extLst>
+      <p:ext uri="{BB962C8B-B14F-4D97-AF65-F5344CB8AC3E}">
+        <p14:creationId xmlns:p14="http://schemas.microsoft.com/office/powerpoint/2010/main" val="1964480937"/>
+      </p:ext>
+    </p:extLst>
+  </p:cSld>
+  <p:clrMapOvr>
+    <a:masterClrMapping/>
+  </p:clrMapOvr>
+</p:sld>
+</file>
+
+<file path=ppt/slides/slide26.xml><?xml version="1.0" encoding="utf-8"?>
+<p:sld xmlns:a="http://schemas.openxmlformats.org/drawingml/2006/main" xmlns:r="http://schemas.openxmlformats.org/officeDocument/2006/relationships" xmlns:p="http://schemas.openxmlformats.org/presentationml/2006/main">
+  <p:cSld>
+    <p:spTree>
+      <p:nvGrpSpPr>
+        <p:cNvPr id="1" name=""/>
+        <p:cNvGrpSpPr/>
+        <p:nvPr/>
+      </p:nvGrpSpPr>
+      <p:grpSpPr>
+        <a:xfrm>
+          <a:off x="0" y="0"/>
+          <a:ext cx="0" cy="0"/>
+          <a:chOff x="0" y="0"/>
+          <a:chExt cx="0" cy="0"/>
+        </a:xfrm>
+      </p:grpSpPr>
+      <p:sp>
+        <p:nvSpPr>
+          <p:cNvPr id="2" name="Title 1">
+            <a:extLst>
+              <a:ext uri="{FF2B5EF4-FFF2-40B4-BE49-F238E27FC236}">
                 <a16:creationId xmlns:a16="http://schemas.microsoft.com/office/drawing/2014/main" id="{1A2C0A77-93D0-8D4E-C438-37656127D72D}"/>
               </a:ext>
             </a:extLst>
@@ -15630,7 +15759,7 @@
 </p:sld>
 </file>
 
-<file path=ppt/slides/slide26.xml><?xml version="1.0" encoding="utf-8"?>
+<file path=ppt/slides/slide27.xml><?xml version="1.0" encoding="utf-8"?>
 <p:sld xmlns:a="http://schemas.openxmlformats.org/drawingml/2006/main" xmlns:r="http://schemas.openxmlformats.org/officeDocument/2006/relationships" xmlns:p="http://schemas.openxmlformats.org/presentationml/2006/main">
   <p:cSld>
     <p:spTree>
@@ -20448,6 +20577,15 @@
 </file>
 
 <file path=customXml/item1.xml><?xml version="1.0" encoding="utf-8"?>
+<?mso-contentType ?>
+<FormTemplates xmlns="http://schemas.microsoft.com/sharepoint/v3/contenttype/forms">
+  <Display>DocumentLibraryForm</Display>
+  <Edit>DocumentLibraryForm</Edit>
+  <New>DocumentLibraryForm</New>
+</FormTemplates>
+</file>
+
+<file path=customXml/item2.xml><?xml version="1.0" encoding="utf-8"?>
 <p:properties xmlns:p="http://schemas.microsoft.com/office/2006/metadata/properties" xmlns:xsi="http://www.w3.org/2001/XMLSchema-instance" xmlns:pc="http://schemas.microsoft.com/office/infopath/2007/PartnerControls">
   <documentManagement>
     <TaxCatchAll xmlns="9bcbe136-86d6-431b-bacc-0597dda5436c" xsi:nil="true"/>
@@ -20456,15 +20594,6 @@
     </lcf76f155ced4ddcb4097134ff3c332f>
   </documentManagement>
 </p:properties>
-</file>
-
-<file path=customXml/item2.xml><?xml version="1.0" encoding="utf-8"?>
-<?mso-contentType ?>
-<FormTemplates xmlns="http://schemas.microsoft.com/sharepoint/v3/contenttype/forms">
-  <Display>DocumentLibraryForm</Display>
-  <Edit>DocumentLibraryForm</Edit>
-  <New>DocumentLibraryForm</New>
-</FormTemplates>
 </file>
 
 <file path=customXml/item3.xml><?xml version="1.0" encoding="utf-8"?>
@@ -20661,20 +20790,20 @@
 </file>
 
 <file path=customXml/itemProps1.xml><?xml version="1.0" encoding="utf-8"?>
+<ds:datastoreItem xmlns:ds="http://schemas.openxmlformats.org/officeDocument/2006/customXml" ds:itemID="{13670D82-03D5-45F4-9F8C-7CE643A31227}">
+  <ds:schemaRefs>
+    <ds:schemaRef ds:uri="http://schemas.microsoft.com/sharepoint/v3/contenttype/forms"/>
+  </ds:schemaRefs>
+</ds:datastoreItem>
+</file>
+
+<file path=customXml/itemProps2.xml><?xml version="1.0" encoding="utf-8"?>
 <ds:datastoreItem xmlns:ds="http://schemas.openxmlformats.org/officeDocument/2006/customXml" ds:itemID="{FEFCA724-EDED-4200-B139-4C4D36D2EFFD}">
   <ds:schemaRefs>
     <ds:schemaRef ds:uri="http://schemas.microsoft.com/office/2006/metadata/properties"/>
     <ds:schemaRef ds:uri="http://schemas.microsoft.com/office/infopath/2007/PartnerControls"/>
     <ds:schemaRef ds:uri="9bcbe136-86d6-431b-bacc-0597dda5436c"/>
     <ds:schemaRef ds:uri="fb282fe6-addb-4abc-8c7a-866097da16fa"/>
-  </ds:schemaRefs>
-</ds:datastoreItem>
-</file>
-
-<file path=customXml/itemProps2.xml><?xml version="1.0" encoding="utf-8"?>
-<ds:datastoreItem xmlns:ds="http://schemas.openxmlformats.org/officeDocument/2006/customXml" ds:itemID="{13670D82-03D5-45F4-9F8C-7CE643A31227}">
-  <ds:schemaRefs>
-    <ds:schemaRef ds:uri="http://schemas.microsoft.com/sharepoint/v3/contenttype/forms"/>
   </ds:schemaRefs>
 </ds:datastoreItem>
 </file>
